--- a/QuizSphere_Review_1_Presentation.pptx
+++ b/QuizSphere_Review_1_Presentation.pptx
@@ -16,6 +16,9 @@
     <p:sldId id="264" r:id="rId15"/>
     <p:sldId id="265" r:id="rId16"/>
     <p:sldId id="266" r:id="rId17"/>
+    <p:sldId id="267" r:id="rId18"/>
+    <p:sldId id="268" r:id="rId19"/>
+    <p:sldId id="269" r:id="rId20"/>
   </p:sldIdLst>
   <p:sldSz cx="12191695" cy="6858000" type="screen4x3"/>
   <p:notesSz cx="6858000" cy="9144000"/>
@@ -3150,7 +3153,7 @@
         <p:spPr>
           <a:xfrm>
             <a:off x="731520" y="1097280"/>
-            <a:ext cx="1645920" cy="320040"/>
+            <a:ext cx="2011680" cy="320040"/>
           </a:xfrm>
           <a:prstGeom prst="rect">
             <a:avLst/>
@@ -3238,7 +3241,7 @@
               </a:defRPr>
             </a:pPr>
             <a:r>
-              <a:t>Setup &amp; Software Requirements Specification (SRS)</a:t>
+              <a:t>Setup &amp; Software Requirements Specification (SRS) with Working Demo</a:t>
             </a:r>
           </a:p>
         </p:txBody>
@@ -3364,7 +3367,7 @@
               </a:defRPr>
             </a:pPr>
             <a:r>
-              <a:t>COURSE &amp; PROJECT TOPIC</a:t>
+              <a:t>COURSE &amp; BASELINE</a:t>
             </a:r>
           </a:p>
           <a:p>
@@ -3648,7 +3651,7 @@
               </a:defRPr>
             </a:pPr>
             <a:r>
-              <a:t>CORE ENGINEERING TARGET</a:t>
+              <a:t>ENGINEERING TARGET</a:t>
             </a:r>
           </a:p>
           <a:p>
@@ -3664,7 +3667,7 @@
             </a:r>
             <a:br/>
             <a:r>
-              <a:t>Deterministic Zero-Defect Auto-Grading</a:t>
+              <a:t>100% Deterministic Auto-Grading</a:t>
             </a:r>
           </a:p>
         </p:txBody>
@@ -3790,7 +3793,7 @@
               </a:defRPr>
             </a:pPr>
             <a:r>
-              <a:t>IMPLEMENTATION PARITY</a:t>
+              <a:t>DUAL PLATFORM DEPLOYMENT</a:t>
             </a:r>
           </a:p>
           <a:p>
@@ -3937,7 +3940,7 @@
               </a:defRPr>
             </a:pPr>
             <a:r>
-              <a:t>Working Application &amp; Live Demonstration Plan</a:t>
+              <a:t>Database &amp; System Design (ACID SQLite Persistence)</a:t>
             </a:r>
           </a:p>
         </p:txBody>
@@ -3951,7 +3954,7 @@
         <p:spPr>
           <a:xfrm>
             <a:off x="731520" y="1645920"/>
-            <a:ext cx="5120640" cy="4480560"/>
+            <a:ext cx="6217920" cy="1371600"/>
           </a:xfrm>
           <a:prstGeom prst="roundRect">
             <a:avLst/>
@@ -3996,7 +3999,7 @@
         <p:spPr>
           <a:xfrm>
             <a:off x="731520" y="1645920"/>
-            <a:ext cx="5120640" cy="73152"/>
+            <a:ext cx="6217920" cy="73152"/>
           </a:xfrm>
           <a:prstGeom prst="rect">
             <a:avLst/>
@@ -4038,8 +4041,8 @@
         </p:nvSpPr>
         <p:spPr>
           <a:xfrm>
-            <a:off x="914400" y="1828800"/>
-            <a:ext cx="4754880" cy="4114800"/>
+            <a:off x="914400" y="1783080"/>
+            <a:ext cx="5852160" cy="1097280"/>
           </a:xfrm>
           <a:prstGeom prst="rect">
             <a:avLst/>
@@ -4054,124 +4057,28 @@
           <a:p>
             <a:pPr>
               <a:spcAft>
-                <a:spcPts val="800"/>
+                <a:spcPts val="400"/>
               </a:spcAft>
-              <a:defRPr sz="1200" b="1">
+              <a:defRPr sz="1100" b="1">
                 <a:solidFill>
                   <a:srgbClr val="3B82F6"/>
                 </a:solidFill>
               </a:defRPr>
             </a:pPr>
             <a:r>
-              <a:t>WEB APPLICATION DEMONSTRATION</a:t>
-            </a:r>
-          </a:p>
-          <a:p>
-            <a:pPr>
-              <a:spcBef>
-                <a:spcPts val="400"/>
-              </a:spcBef>
-              <a:defRPr b="1" sz="1000">
+              <a:t>TABLE: users</a:t>
+            </a:r>
+          </a:p>
+          <a:p>
+            <a:pPr>
+              <a:defRPr sz="900">
                 <a:solidFill>
                   <a:srgbClr val="FFFFFF"/>
                 </a:solidFill>
               </a:defRPr>
             </a:pPr>
             <a:r>
-              <a:t>• Command to Start:</a:t>
-            </a:r>
-          </a:p>
-          <a:p>
-            <a:pPr>
-              <a:defRPr sz="900">
-                <a:solidFill>
-                  <a:srgbClr val="CBD5E1"/>
-                </a:solidFill>
-              </a:defRPr>
-            </a:pPr>
-            <a:r>
-              <a:t>  python server.py (Runs on http://localhost:8000)</a:t>
-            </a:r>
-          </a:p>
-          <a:p>
-            <a:pPr>
-              <a:spcBef>
-                <a:spcPts val="400"/>
-              </a:spcBef>
-              <a:defRPr b="1" sz="1000">
-                <a:solidFill>
-                  <a:srgbClr val="FFFFFF"/>
-                </a:solidFill>
-              </a:defRPr>
-            </a:pPr>
-            <a:r>
-              <a:t>• Live Student Workflow:</a:t>
-            </a:r>
-          </a:p>
-          <a:p>
-            <a:pPr>
-              <a:defRPr sz="900">
-                <a:solidFill>
-                  <a:srgbClr val="CBD5E1"/>
-                </a:solidFill>
-              </a:defRPr>
-            </a:pPr>
-            <a:r>
-              <a:t>  Sign in as 'student' / 'student123' -&gt; Enter Join Code 'QZ-1001' -&gt; Complete assessment -&gt; Demonstrate anti-cheat alert -&gt; Receive instant scorecard.</a:t>
-            </a:r>
-          </a:p>
-          <a:p>
-            <a:pPr>
-              <a:spcBef>
-                <a:spcPts val="400"/>
-              </a:spcBef>
-              <a:defRPr b="1" sz="1000">
-                <a:solidFill>
-                  <a:srgbClr val="FFFFFF"/>
-                </a:solidFill>
-              </a:defRPr>
-            </a:pPr>
-            <a:r>
-              <a:t>• Live Faculty Workflow:</a:t>
-            </a:r>
-          </a:p>
-          <a:p>
-            <a:pPr>
-              <a:defRPr sz="900">
-                <a:solidFill>
-                  <a:srgbClr val="CBD5E1"/>
-                </a:solidFill>
-              </a:defRPr>
-            </a:pPr>
-            <a:r>
-              <a:t>  Sign in as 'faculty' / 'faculty123' -&gt; Create quiz with AI Question Generator -&gt; Copy Join Code -&gt; View class gradebook with submitted candidate results.</a:t>
-            </a:r>
-          </a:p>
-          <a:p>
-            <a:pPr>
-              <a:spcBef>
-                <a:spcPts val="400"/>
-              </a:spcBef>
-              <a:defRPr b="1" sz="1000">
-                <a:solidFill>
-                  <a:srgbClr val="FFFFFF"/>
-                </a:solidFill>
-              </a:defRPr>
-            </a:pPr>
-            <a:r>
-              <a:t>• Live Admin Workflow:</a:t>
-            </a:r>
-          </a:p>
-          <a:p>
-            <a:pPr>
-              <a:defRPr sz="900">
-                <a:solidFill>
-                  <a:srgbClr val="CBD5E1"/>
-                </a:solidFill>
-              </a:defRPr>
-            </a:pPr>
-            <a:r>
-              <a:t>  Sign in as 'admin' / 'admin123' -&gt; Inspect platform telemetry KPIs -&gt; Open candidate scorecard modal -&gt; Download Roster &amp; Submissions CSV.</a:t>
+              <a:t>id (PK), username (UNIQUE), password, role, full_name, department, created_at</a:t>
             </a:r>
           </a:p>
         </p:txBody>
@@ -4184,8 +4091,8 @@
         </p:nvSpPr>
         <p:spPr>
           <a:xfrm>
-            <a:off x="6217920" y="1645920"/>
-            <a:ext cx="5212080" cy="4480560"/>
+            <a:off x="731520" y="3154680"/>
+            <a:ext cx="6217920" cy="1371600"/>
           </a:xfrm>
           <a:prstGeom prst="roundRect">
             <a:avLst/>
@@ -4229,8 +4136,8 @@
         </p:nvSpPr>
         <p:spPr>
           <a:xfrm>
-            <a:off x="6217920" y="1645920"/>
-            <a:ext cx="5212080" cy="73152"/>
+            <a:off x="731520" y="3154680"/>
+            <a:ext cx="6217920" cy="73152"/>
           </a:xfrm>
           <a:prstGeom prst="rect">
             <a:avLst/>
@@ -4272,8 +4179,8 @@
         </p:nvSpPr>
         <p:spPr>
           <a:xfrm>
-            <a:off x="6400800" y="1828800"/>
-            <a:ext cx="4846320" cy="4114800"/>
+            <a:off x="914400" y="3291840"/>
+            <a:ext cx="5852160" cy="1097280"/>
           </a:xfrm>
           <a:prstGeom prst="rect">
             <a:avLst/>
@@ -4288,151 +4195,367 @@
           <a:p>
             <a:pPr>
               <a:spcAft>
-                <a:spcPts val="800"/>
+                <a:spcPts val="400"/>
               </a:spcAft>
-              <a:defRPr sz="1200" b="1">
+              <a:defRPr sz="1100" b="1">
                 <a:solidFill>
                   <a:srgbClr val="10B981"/>
                 </a:solidFill>
               </a:defRPr>
             </a:pPr>
             <a:r>
-              <a:t>DESKTOP APPLICATION DEMONSTRATION</a:t>
+              <a:t>TABLE: quizzes</a:t>
+            </a:r>
+          </a:p>
+          <a:p>
+            <a:pPr>
+              <a:defRPr sz="900">
+                <a:solidFill>
+                  <a:srgbClr val="FFFFFF"/>
+                </a:solidFill>
+              </a:defRPr>
+            </a:pPr>
+            <a:r>
+              <a:t>id (PK), join_code (UNIQUE), teacher_name, title, category, duration_minutes, passing_score, tags, questions_json, created_at</a:t>
+            </a:r>
+          </a:p>
+        </p:txBody>
+      </p:sp>
+      <p:sp>
+        <p:nvSpPr>
+          <p:cNvPr id="11" name="Rounded Rectangle 10"/>
+          <p:cNvSpPr/>
+          <p:nvPr/>
+        </p:nvSpPr>
+        <p:spPr>
+          <a:xfrm>
+            <a:off x="731520" y="4663440"/>
+            <a:ext cx="6217920" cy="1371600"/>
+          </a:xfrm>
+          <a:prstGeom prst="roundRect">
+            <a:avLst/>
+          </a:prstGeom>
+          <a:solidFill>
+            <a:srgbClr val="1E293B"/>
+          </a:solidFill>
+          <a:ln w="12700">
+            <a:solidFill>
+              <a:srgbClr val="334155"/>
+            </a:solidFill>
+          </a:ln>
+        </p:spPr>
+        <p:style>
+          <a:lnRef idx="1">
+            <a:schemeClr val="accent1"/>
+          </a:lnRef>
+          <a:fillRef idx="3">
+            <a:schemeClr val="accent1"/>
+          </a:fillRef>
+          <a:effectRef idx="2">
+            <a:schemeClr val="accent1"/>
+          </a:effectRef>
+          <a:fontRef idx="minor">
+            <a:schemeClr val="lt1"/>
+          </a:fontRef>
+        </p:style>
+        <p:txBody>
+          <a:bodyPr rtlCol="0" anchor="ctr"/>
+          <a:lstStyle/>
+          <a:p>
+            <a:pPr algn="ctr"/>
+          </a:p>
+        </p:txBody>
+      </p:sp>
+      <p:sp>
+        <p:nvSpPr>
+          <p:cNvPr id="12" name="Rectangle 11"/>
+          <p:cNvSpPr/>
+          <p:nvPr/>
+        </p:nvSpPr>
+        <p:spPr>
+          <a:xfrm>
+            <a:off x="731520" y="4663440"/>
+            <a:ext cx="6217920" cy="73152"/>
+          </a:xfrm>
+          <a:prstGeom prst="rect">
+            <a:avLst/>
+          </a:prstGeom>
+          <a:solidFill>
+            <a:srgbClr val="8B5CF6"/>
+          </a:solidFill>
+          <a:ln>
+            <a:noFill/>
+          </a:ln>
+        </p:spPr>
+        <p:style>
+          <a:lnRef idx="1">
+            <a:schemeClr val="accent1"/>
+          </a:lnRef>
+          <a:fillRef idx="3">
+            <a:schemeClr val="accent1"/>
+          </a:fillRef>
+          <a:effectRef idx="2">
+            <a:schemeClr val="accent1"/>
+          </a:effectRef>
+          <a:fontRef idx="minor">
+            <a:schemeClr val="lt1"/>
+          </a:fontRef>
+        </p:style>
+        <p:txBody>
+          <a:bodyPr rtlCol="0" anchor="ctr"/>
+          <a:lstStyle/>
+          <a:p>
+            <a:pPr algn="ctr"/>
+          </a:p>
+        </p:txBody>
+      </p:sp>
+      <p:sp>
+        <p:nvSpPr>
+          <p:cNvPr id="13" name="TextBox 12"/>
+          <p:cNvSpPr txBox="1"/>
+          <p:nvPr/>
+        </p:nvSpPr>
+        <p:spPr>
+          <a:xfrm>
+            <a:off x="914400" y="4800600"/>
+            <a:ext cx="5852160" cy="1097280"/>
+          </a:xfrm>
+          <a:prstGeom prst="rect">
+            <a:avLst/>
+          </a:prstGeom>
+          <a:noFill/>
+        </p:spPr>
+        <p:txBody>
+          <a:bodyPr wrap="square">
+            <a:spAutoFit/>
+          </a:bodyPr>
+          <a:lstStyle/>
+          <a:p>
+            <a:pPr>
+              <a:spcAft>
+                <a:spcPts val="400"/>
+              </a:spcAft>
+              <a:defRPr sz="1100" b="1">
+                <a:solidFill>
+                  <a:srgbClr val="8B5CF6"/>
+                </a:solidFill>
+              </a:defRPr>
+            </a:pPr>
+            <a:r>
+              <a:t>TABLE: attempts</a:t>
+            </a:r>
+          </a:p>
+          <a:p>
+            <a:pPr>
+              <a:defRPr sz="900">
+                <a:solidFill>
+                  <a:srgbClr val="FFFFFF"/>
+                </a:solidFill>
+              </a:defRPr>
+            </a:pPr>
+            <a:r>
+              <a:t>id (PK), quiz_id (FK), join_code, quiz_title, teacher_name, student_name, score, total_questions, percentage, passed, cheat_violations, submitted_at</a:t>
+            </a:r>
+          </a:p>
+        </p:txBody>
+      </p:sp>
+      <p:sp>
+        <p:nvSpPr>
+          <p:cNvPr id="14" name="Rounded Rectangle 13"/>
+          <p:cNvSpPr/>
+          <p:nvPr/>
+        </p:nvSpPr>
+        <p:spPr>
+          <a:xfrm>
+            <a:off x="7132320" y="1645920"/>
+            <a:ext cx="4297680" cy="4389120"/>
+          </a:xfrm>
+          <a:prstGeom prst="roundRect">
+            <a:avLst/>
+          </a:prstGeom>
+          <a:solidFill>
+            <a:srgbClr val="1E293B"/>
+          </a:solidFill>
+          <a:ln w="12700">
+            <a:solidFill>
+              <a:srgbClr val="334155"/>
+            </a:solidFill>
+          </a:ln>
+        </p:spPr>
+        <p:style>
+          <a:lnRef idx="1">
+            <a:schemeClr val="accent1"/>
+          </a:lnRef>
+          <a:fillRef idx="3">
+            <a:schemeClr val="accent1"/>
+          </a:fillRef>
+          <a:effectRef idx="2">
+            <a:schemeClr val="accent1"/>
+          </a:effectRef>
+          <a:fontRef idx="minor">
+            <a:schemeClr val="lt1"/>
+          </a:fontRef>
+        </p:style>
+        <p:txBody>
+          <a:bodyPr rtlCol="0" anchor="ctr"/>
+          <a:lstStyle/>
+          <a:p>
+            <a:pPr algn="ctr"/>
+          </a:p>
+        </p:txBody>
+      </p:sp>
+      <p:sp>
+        <p:nvSpPr>
+          <p:cNvPr id="15" name="Rectangle 14"/>
+          <p:cNvSpPr/>
+          <p:nvPr/>
+        </p:nvSpPr>
+        <p:spPr>
+          <a:xfrm>
+            <a:off x="7132320" y="1645920"/>
+            <a:ext cx="4297680" cy="73152"/>
+          </a:xfrm>
+          <a:prstGeom prst="rect">
+            <a:avLst/>
+          </a:prstGeom>
+          <a:solidFill>
+            <a:srgbClr val="F59E0B"/>
+          </a:solidFill>
+          <a:ln>
+            <a:noFill/>
+          </a:ln>
+        </p:spPr>
+        <p:style>
+          <a:lnRef idx="1">
+            <a:schemeClr val="accent1"/>
+          </a:lnRef>
+          <a:fillRef idx="3">
+            <a:schemeClr val="accent1"/>
+          </a:fillRef>
+          <a:effectRef idx="2">
+            <a:schemeClr val="accent1"/>
+          </a:effectRef>
+          <a:fontRef idx="minor">
+            <a:schemeClr val="lt1"/>
+          </a:fontRef>
+        </p:style>
+        <p:txBody>
+          <a:bodyPr rtlCol="0" anchor="ctr"/>
+          <a:lstStyle/>
+          <a:p>
+            <a:pPr algn="ctr"/>
+          </a:p>
+        </p:txBody>
+      </p:sp>
+      <p:sp>
+        <p:nvSpPr>
+          <p:cNvPr id="16" name="TextBox 15"/>
+          <p:cNvSpPr txBox="1"/>
+          <p:nvPr/>
+        </p:nvSpPr>
+        <p:spPr>
+          <a:xfrm>
+            <a:off x="7315200" y="1828800"/>
+            <a:ext cx="3931920" cy="4023360"/>
+          </a:xfrm>
+          <a:prstGeom prst="rect">
+            <a:avLst/>
+          </a:prstGeom>
+          <a:noFill/>
+        </p:spPr>
+        <p:txBody>
+          <a:bodyPr wrap="square">
+            <a:spAutoFit/>
+          </a:bodyPr>
+          <a:lstStyle/>
+          <a:p>
+            <a:pPr>
+              <a:spcAft>
+                <a:spcPts val="1000"/>
+              </a:spcAft>
+              <a:defRPr sz="1100" b="1">
+                <a:solidFill>
+                  <a:srgbClr val="F59E0B"/>
+                </a:solidFill>
+              </a:defRPr>
+            </a:pPr>
+            <a:r>
+              <a:t>DATA INTEGRITY &amp; DESIGN HIGHLIGHTS</a:t>
             </a:r>
           </a:p>
           <a:p>
             <a:pPr>
               <a:spcBef>
-                <a:spcPts val="400"/>
+                <a:spcPts val="500"/>
               </a:spcBef>
-              <a:defRPr b="1" sz="1000">
-                <a:solidFill>
-                  <a:srgbClr val="FFFFFF"/>
-                </a:solidFill>
-              </a:defRPr>
-            </a:pPr>
-            <a:r>
-              <a:t>• Command to Start:</a:t>
-            </a:r>
-          </a:p>
-          <a:p>
-            <a:pPr>
-              <a:defRPr sz="900">
+              <a:defRPr sz="950">
                 <a:solidFill>
                   <a:srgbClr val="CBD5E1"/>
                 </a:solidFill>
               </a:defRPr>
             </a:pPr>
             <a:r>
-              <a:t>  python desktop_app.py (Native Windows Standalone GUI)</a:t>
+              <a:t>• ACID Transactions: All quiz updates and candidate submissions execute in atomic SQLite write transactions.</a:t>
             </a:r>
           </a:p>
           <a:p>
             <a:pPr>
               <a:spcBef>
-                <a:spcPts val="400"/>
+                <a:spcPts val="500"/>
               </a:spcBef>
-              <a:defRPr b="1" sz="1000">
-                <a:solidFill>
-                  <a:srgbClr val="FFFFFF"/>
-                </a:solidFill>
-              </a:defRPr>
-            </a:pPr>
-            <a:r>
-              <a:t>• Desktop Authentication:</a:t>
-            </a:r>
-          </a:p>
-          <a:p>
-            <a:pPr>
-              <a:defRPr sz="900">
+              <a:defRPr sz="950">
                 <a:solidFill>
                   <a:srgbClr val="CBD5E1"/>
                 </a:solidFill>
               </a:defRPr>
             </a:pPr>
             <a:r>
-              <a:t>  Native authentication dialog supporting Student, Faculty, and Admin sign-in with instant role-specific tab adaptation.</a:t>
+              <a:t>• Normalized Indexing: Indexed lookups on Join Codes (UPPER) and usernames ensure sub-millisecond retrieval.</a:t>
             </a:r>
           </a:p>
           <a:p>
             <a:pPr>
               <a:spcBef>
-                <a:spcPts val="400"/>
+                <a:spcPts val="500"/>
               </a:spcBef>
-              <a:defRPr b="1" sz="1000">
-                <a:solidFill>
-                  <a:srgbClr val="FFFFFF"/>
-                </a:solidFill>
-              </a:defRPr>
-            </a:pPr>
-            <a:r>
-              <a:t>• Strict Grid Table Layout:</a:t>
-            </a:r>
-          </a:p>
-          <a:p>
-            <a:pPr>
-              <a:defRPr sz="900">
+              <a:defRPr sz="950">
                 <a:solidFill>
                   <a:srgbClr val="CBD5E1"/>
                 </a:solidFill>
               </a:defRPr>
             </a:pPr>
             <a:r>
-              <a:t>  Pixel-perfect 44px rows with zero vertical detachment; aligned columns for User ID, Name, Role, Quizzes, Avg Score, Pass Rate, Flags.</a:t>
+              <a:t>• Durable Question Snapshotting: Questions are serialized as self-contained JSON strings inside `quizzes` to prevent external dependency drift.</a:t>
             </a:r>
           </a:p>
           <a:p>
             <a:pPr>
               <a:spcBef>
-                <a:spcPts val="400"/>
+                <a:spcPts val="500"/>
               </a:spcBef>
-              <a:defRPr b="1" sz="1000">
-                <a:solidFill>
-                  <a:srgbClr val="FFFFFF"/>
-                </a:solidFill>
-              </a:defRPr>
-            </a:pPr>
-            <a:r>
-              <a:t>• Theme &amp; Accessibility:</a:t>
-            </a:r>
-          </a:p>
-          <a:p>
-            <a:pPr>
-              <a:defRPr sz="900">
+              <a:defRPr sz="950">
                 <a:solidFill>
                   <a:srgbClr val="CBD5E1"/>
                 </a:solidFill>
               </a:defRPr>
             </a:pPr>
             <a:r>
-              <a:t>  Toggle between Warm Cream Mode and High-Contrast Dark Mode; dynamic font scaling buttons (A+/A-) and Focus Mode.</a:t>
+              <a:t>• Denormalized Submission Audit: Attempts store student name, quiz title, and authoring teacher to ensure immutable historical scorecards even if parent records change.</a:t>
             </a:r>
           </a:p>
           <a:p>
             <a:pPr>
               <a:spcBef>
-                <a:spcPts val="400"/>
+                <a:spcPts val="500"/>
               </a:spcBef>
-              <a:defRPr b="1" sz="1000">
-                <a:solidFill>
-                  <a:srgbClr val="FFFFFF"/>
-                </a:solidFill>
-              </a:defRPr>
-            </a:pPr>
-            <a:r>
-              <a:t>• Test Suite Verification:</a:t>
-            </a:r>
-          </a:p>
-          <a:p>
-            <a:pPr>
-              <a:defRPr sz="900">
+              <a:defRPr sz="950">
                 <a:solidFill>
                   <a:srgbClr val="CBD5E1"/>
                 </a:solidFill>
               </a:defRPr>
             </a:pPr>
             <a:r>
-              <a:t>  python -m pytest tests/ (All 22 unit tests passing).</a:t>
+              <a:t>• Automated Snapshot Engine: Backups are saved to `backups/quiz_system_*.db` protecting institutional records.</a:t>
             </a:r>
           </a:p>
         </p:txBody>
@@ -4563,6 +4686,2208 @@
               </a:defRPr>
             </a:pPr>
             <a:r>
+              <a:t>CRUD Operations Aligned with Quality Goals</a:t>
+            </a:r>
+          </a:p>
+        </p:txBody>
+      </p:sp>
+      <p:sp>
+        <p:nvSpPr>
+          <p:cNvPr id="5" name="Rounded Rectangle 4"/>
+          <p:cNvSpPr/>
+          <p:nvPr/>
+        </p:nvSpPr>
+        <p:spPr>
+          <a:xfrm>
+            <a:off x="731520" y="1645920"/>
+            <a:ext cx="5212080" cy="2148840"/>
+          </a:xfrm>
+          <a:prstGeom prst="roundRect">
+            <a:avLst/>
+          </a:prstGeom>
+          <a:solidFill>
+            <a:srgbClr val="1E293B"/>
+          </a:solidFill>
+          <a:ln w="12700">
+            <a:solidFill>
+              <a:srgbClr val="334155"/>
+            </a:solidFill>
+          </a:ln>
+        </p:spPr>
+        <p:style>
+          <a:lnRef idx="1">
+            <a:schemeClr val="accent1"/>
+          </a:lnRef>
+          <a:fillRef idx="3">
+            <a:schemeClr val="accent1"/>
+          </a:fillRef>
+          <a:effectRef idx="2">
+            <a:schemeClr val="accent1"/>
+          </a:effectRef>
+          <a:fontRef idx="minor">
+            <a:schemeClr val="lt1"/>
+          </a:fontRef>
+        </p:style>
+        <p:txBody>
+          <a:bodyPr rtlCol="0" anchor="ctr"/>
+          <a:lstStyle/>
+          <a:p>
+            <a:pPr algn="ctr"/>
+          </a:p>
+        </p:txBody>
+      </p:sp>
+      <p:sp>
+        <p:nvSpPr>
+          <p:cNvPr id="6" name="Rectangle 5"/>
+          <p:cNvSpPr/>
+          <p:nvPr/>
+        </p:nvSpPr>
+        <p:spPr>
+          <a:xfrm>
+            <a:off x="731520" y="1645920"/>
+            <a:ext cx="5212080" cy="73152"/>
+          </a:xfrm>
+          <a:prstGeom prst="rect">
+            <a:avLst/>
+          </a:prstGeom>
+          <a:solidFill>
+            <a:srgbClr val="3B82F6"/>
+          </a:solidFill>
+          <a:ln>
+            <a:noFill/>
+          </a:ln>
+        </p:spPr>
+        <p:style>
+          <a:lnRef idx="1">
+            <a:schemeClr val="accent1"/>
+          </a:lnRef>
+          <a:fillRef idx="3">
+            <a:schemeClr val="accent1"/>
+          </a:fillRef>
+          <a:effectRef idx="2">
+            <a:schemeClr val="accent1"/>
+          </a:effectRef>
+          <a:fontRef idx="minor">
+            <a:schemeClr val="lt1"/>
+          </a:fontRef>
+        </p:style>
+        <p:txBody>
+          <a:bodyPr rtlCol="0" anchor="ctr"/>
+          <a:lstStyle/>
+          <a:p>
+            <a:pPr algn="ctr"/>
+          </a:p>
+        </p:txBody>
+      </p:sp>
+      <p:sp>
+        <p:nvSpPr>
+          <p:cNvPr id="7" name="TextBox 6"/>
+          <p:cNvSpPr txBox="1"/>
+          <p:nvPr/>
+        </p:nvSpPr>
+        <p:spPr>
+          <a:xfrm>
+            <a:off x="914400" y="1783080"/>
+            <a:ext cx="4846320" cy="1828800"/>
+          </a:xfrm>
+          <a:prstGeom prst="rect">
+            <a:avLst/>
+          </a:prstGeom>
+          <a:noFill/>
+        </p:spPr>
+        <p:txBody>
+          <a:bodyPr wrap="square">
+            <a:spAutoFit/>
+          </a:bodyPr>
+          <a:lstStyle/>
+          <a:p>
+            <a:pPr>
+              <a:spcAft>
+                <a:spcPts val="400"/>
+              </a:spcAft>
+              <a:defRPr sz="1100" b="1">
+                <a:solidFill>
+                  <a:srgbClr val="3B82F6"/>
+                </a:solidFill>
+              </a:defRPr>
+            </a:pPr>
+            <a:r>
+              <a:t>USER MANAGEMENT</a:t>
+            </a:r>
+          </a:p>
+          <a:p>
+            <a:pPr>
+              <a:spcBef>
+                <a:spcPts val="200"/>
+              </a:spcBef>
+              <a:defRPr sz="950">
+                <a:solidFill>
+                  <a:srgbClr val="FFFFFF"/>
+                </a:solidFill>
+              </a:defRPr>
+            </a:pPr>
+            <a:r>
+              <a:t>• CREATE: Register accounts via /api/auth/register or Desktop UI</a:t>
+            </a:r>
+          </a:p>
+          <a:p>
+            <a:pPr>
+              <a:spcBef>
+                <a:spcPts val="200"/>
+              </a:spcBef>
+              <a:defRPr sz="950">
+                <a:solidFill>
+                  <a:srgbClr val="FFFFFF"/>
+                </a:solidFill>
+              </a:defRPr>
+            </a:pPr>
+            <a:r>
+              <a:t>• READ: Authenticate (/api/auth/login), Roster (/api/admin/users)</a:t>
+            </a:r>
+          </a:p>
+          <a:p>
+            <a:pPr>
+              <a:spcBef>
+                <a:spcPts val="200"/>
+              </a:spcBef>
+              <a:defRPr sz="950">
+                <a:solidFill>
+                  <a:srgbClr val="FFFFFF"/>
+                </a:solidFill>
+              </a:defRPr>
+            </a:pPr>
+            <a:r>
+              <a:t>• UPDATE: Department assignment, accommodation time buffers</a:t>
+            </a:r>
+          </a:p>
+          <a:p>
+            <a:pPr>
+              <a:spcBef>
+                <a:spcPts val="200"/>
+              </a:spcBef>
+              <a:defRPr sz="950">
+                <a:solidFill>
+                  <a:srgbClr val="FFFFFF"/>
+                </a:solidFill>
+              </a:defRPr>
+            </a:pPr>
+            <a:r>
+              <a:t>• DELETE: Soft-deactivate user accounts and audit permissions</a:t>
+            </a:r>
+          </a:p>
+        </p:txBody>
+      </p:sp>
+      <p:sp>
+        <p:nvSpPr>
+          <p:cNvPr id="8" name="Rounded Rectangle 7"/>
+          <p:cNvSpPr/>
+          <p:nvPr/>
+        </p:nvSpPr>
+        <p:spPr>
+          <a:xfrm>
+            <a:off x="6172200" y="1645920"/>
+            <a:ext cx="5212080" cy="2148840"/>
+          </a:xfrm>
+          <a:prstGeom prst="roundRect">
+            <a:avLst/>
+          </a:prstGeom>
+          <a:solidFill>
+            <a:srgbClr val="1E293B"/>
+          </a:solidFill>
+          <a:ln w="12700">
+            <a:solidFill>
+              <a:srgbClr val="334155"/>
+            </a:solidFill>
+          </a:ln>
+        </p:spPr>
+        <p:style>
+          <a:lnRef idx="1">
+            <a:schemeClr val="accent1"/>
+          </a:lnRef>
+          <a:fillRef idx="3">
+            <a:schemeClr val="accent1"/>
+          </a:fillRef>
+          <a:effectRef idx="2">
+            <a:schemeClr val="accent1"/>
+          </a:effectRef>
+          <a:fontRef idx="minor">
+            <a:schemeClr val="lt1"/>
+          </a:fontRef>
+        </p:style>
+        <p:txBody>
+          <a:bodyPr rtlCol="0" anchor="ctr"/>
+          <a:lstStyle/>
+          <a:p>
+            <a:pPr algn="ctr"/>
+          </a:p>
+        </p:txBody>
+      </p:sp>
+      <p:sp>
+        <p:nvSpPr>
+          <p:cNvPr id="9" name="Rectangle 8"/>
+          <p:cNvSpPr/>
+          <p:nvPr/>
+        </p:nvSpPr>
+        <p:spPr>
+          <a:xfrm>
+            <a:off x="6172200" y="1645920"/>
+            <a:ext cx="5212080" cy="73152"/>
+          </a:xfrm>
+          <a:prstGeom prst="rect">
+            <a:avLst/>
+          </a:prstGeom>
+          <a:solidFill>
+            <a:srgbClr val="10B981"/>
+          </a:solidFill>
+          <a:ln>
+            <a:noFill/>
+          </a:ln>
+        </p:spPr>
+        <p:style>
+          <a:lnRef idx="1">
+            <a:schemeClr val="accent1"/>
+          </a:lnRef>
+          <a:fillRef idx="3">
+            <a:schemeClr val="accent1"/>
+          </a:fillRef>
+          <a:effectRef idx="2">
+            <a:schemeClr val="accent1"/>
+          </a:effectRef>
+          <a:fontRef idx="minor">
+            <a:schemeClr val="lt1"/>
+          </a:fontRef>
+        </p:style>
+        <p:txBody>
+          <a:bodyPr rtlCol="0" anchor="ctr"/>
+          <a:lstStyle/>
+          <a:p>
+            <a:pPr algn="ctr"/>
+          </a:p>
+        </p:txBody>
+      </p:sp>
+      <p:sp>
+        <p:nvSpPr>
+          <p:cNvPr id="10" name="TextBox 9"/>
+          <p:cNvSpPr txBox="1"/>
+          <p:nvPr/>
+        </p:nvSpPr>
+        <p:spPr>
+          <a:xfrm>
+            <a:off x="6355080" y="1783080"/>
+            <a:ext cx="4846320" cy="1828800"/>
+          </a:xfrm>
+          <a:prstGeom prst="rect">
+            <a:avLst/>
+          </a:prstGeom>
+          <a:noFill/>
+        </p:spPr>
+        <p:txBody>
+          <a:bodyPr wrap="square">
+            <a:spAutoFit/>
+          </a:bodyPr>
+          <a:lstStyle/>
+          <a:p>
+            <a:pPr>
+              <a:spcAft>
+                <a:spcPts val="400"/>
+              </a:spcAft>
+              <a:defRPr sz="1100" b="1">
+                <a:solidFill>
+                  <a:srgbClr val="10B981"/>
+                </a:solidFill>
+              </a:defRPr>
+            </a:pPr>
+            <a:r>
+              <a:t>ASSESSMENT MANAGEMENT</a:t>
+            </a:r>
+          </a:p>
+          <a:p>
+            <a:pPr>
+              <a:spcBef>
+                <a:spcPts val="200"/>
+              </a:spcBef>
+              <a:defRPr sz="950">
+                <a:solidFill>
+                  <a:srgbClr val="FFFFFF"/>
+                </a:solidFill>
+              </a:defRPr>
+            </a:pPr>
+            <a:r>
+              <a:t>• CREATE: Manual authoring (/api/quizzes) or AI Wizard (/api/ai-generate)</a:t>
+            </a:r>
+          </a:p>
+          <a:p>
+            <a:pPr>
+              <a:spcBef>
+                <a:spcPts val="200"/>
+              </a:spcBef>
+              <a:defRPr sz="950">
+                <a:solidFill>
+                  <a:srgbClr val="FFFFFF"/>
+                </a:solidFill>
+              </a:defRPr>
+            </a:pPr>
+            <a:r>
+              <a:t>• READ: Code resolver (/api/quizzes/code/{code}), Quiz listings</a:t>
+            </a:r>
+          </a:p>
+          <a:p>
+            <a:pPr>
+              <a:spcBef>
+                <a:spcPts val="200"/>
+              </a:spcBef>
+              <a:defRPr sz="950">
+                <a:solidFill>
+                  <a:srgbClr val="FFFFFF"/>
+                </a:solidFill>
+              </a:defRPr>
+            </a:pPr>
+            <a:r>
+              <a:t>• UPDATE: Modify time duration, passing mark, or question contents</a:t>
+            </a:r>
+          </a:p>
+          <a:p>
+            <a:pPr>
+              <a:spcBef>
+                <a:spcPts val="200"/>
+              </a:spcBef>
+              <a:defRPr sz="950">
+                <a:solidFill>
+                  <a:srgbClr val="FFFFFF"/>
+                </a:solidFill>
+              </a:defRPr>
+            </a:pPr>
+            <a:r>
+              <a:t>• DELETE: Archive assessment and withdraw public Join Code</a:t>
+            </a:r>
+          </a:p>
+        </p:txBody>
+      </p:sp>
+      <p:sp>
+        <p:nvSpPr>
+          <p:cNvPr id="11" name="Rounded Rectangle 10"/>
+          <p:cNvSpPr/>
+          <p:nvPr/>
+        </p:nvSpPr>
+        <p:spPr>
+          <a:xfrm>
+            <a:off x="731520" y="3977639"/>
+            <a:ext cx="5212080" cy="2148840"/>
+          </a:xfrm>
+          <a:prstGeom prst="roundRect">
+            <a:avLst/>
+          </a:prstGeom>
+          <a:solidFill>
+            <a:srgbClr val="1E293B"/>
+          </a:solidFill>
+          <a:ln w="12700">
+            <a:solidFill>
+              <a:srgbClr val="334155"/>
+            </a:solidFill>
+          </a:ln>
+        </p:spPr>
+        <p:style>
+          <a:lnRef idx="1">
+            <a:schemeClr val="accent1"/>
+          </a:lnRef>
+          <a:fillRef idx="3">
+            <a:schemeClr val="accent1"/>
+          </a:fillRef>
+          <a:effectRef idx="2">
+            <a:schemeClr val="accent1"/>
+          </a:effectRef>
+          <a:fontRef idx="minor">
+            <a:schemeClr val="lt1"/>
+          </a:fontRef>
+        </p:style>
+        <p:txBody>
+          <a:bodyPr rtlCol="0" anchor="ctr"/>
+          <a:lstStyle/>
+          <a:p>
+            <a:pPr algn="ctr"/>
+          </a:p>
+        </p:txBody>
+      </p:sp>
+      <p:sp>
+        <p:nvSpPr>
+          <p:cNvPr id="12" name="Rectangle 11"/>
+          <p:cNvSpPr/>
+          <p:nvPr/>
+        </p:nvSpPr>
+        <p:spPr>
+          <a:xfrm>
+            <a:off x="731520" y="3977639"/>
+            <a:ext cx="5212080" cy="73152"/>
+          </a:xfrm>
+          <a:prstGeom prst="rect">
+            <a:avLst/>
+          </a:prstGeom>
+          <a:solidFill>
+            <a:srgbClr val="F59E0B"/>
+          </a:solidFill>
+          <a:ln>
+            <a:noFill/>
+          </a:ln>
+        </p:spPr>
+        <p:style>
+          <a:lnRef idx="1">
+            <a:schemeClr val="accent1"/>
+          </a:lnRef>
+          <a:fillRef idx="3">
+            <a:schemeClr val="accent1"/>
+          </a:fillRef>
+          <a:effectRef idx="2">
+            <a:schemeClr val="accent1"/>
+          </a:effectRef>
+          <a:fontRef idx="minor">
+            <a:schemeClr val="lt1"/>
+          </a:fontRef>
+        </p:style>
+        <p:txBody>
+          <a:bodyPr rtlCol="0" anchor="ctr"/>
+          <a:lstStyle/>
+          <a:p>
+            <a:pPr algn="ctr"/>
+          </a:p>
+        </p:txBody>
+      </p:sp>
+      <p:sp>
+        <p:nvSpPr>
+          <p:cNvPr id="13" name="TextBox 12"/>
+          <p:cNvSpPr txBox="1"/>
+          <p:nvPr/>
+        </p:nvSpPr>
+        <p:spPr>
+          <a:xfrm>
+            <a:off x="914400" y="4114799"/>
+            <a:ext cx="4846320" cy="1828800"/>
+          </a:xfrm>
+          <a:prstGeom prst="rect">
+            <a:avLst/>
+          </a:prstGeom>
+          <a:noFill/>
+        </p:spPr>
+        <p:txBody>
+          <a:bodyPr wrap="square">
+            <a:spAutoFit/>
+          </a:bodyPr>
+          <a:lstStyle/>
+          <a:p>
+            <a:pPr>
+              <a:spcAft>
+                <a:spcPts val="400"/>
+              </a:spcAft>
+              <a:defRPr sz="1100" b="1">
+                <a:solidFill>
+                  <a:srgbClr val="F59E0B"/>
+                </a:solidFill>
+              </a:defRPr>
+            </a:pPr>
+            <a:r>
+              <a:t>SUBMISSIONS &amp; AUDIT</a:t>
+            </a:r>
+          </a:p>
+          <a:p>
+            <a:pPr>
+              <a:spcBef>
+                <a:spcPts val="200"/>
+              </a:spcBef>
+              <a:defRPr sz="950">
+                <a:solidFill>
+                  <a:srgbClr val="FFFFFF"/>
+                </a:solidFill>
+              </a:defRPr>
+            </a:pPr>
+            <a:r>
+              <a:t>• CREATE: Atomic test submission (/api/quizzes/{id}/submit)</a:t>
+            </a:r>
+          </a:p>
+          <a:p>
+            <a:pPr>
+              <a:spcBef>
+                <a:spcPts val="200"/>
+              </a:spcBef>
+              <a:defRPr sz="950">
+                <a:solidFill>
+                  <a:srgbClr val="FFFFFF"/>
+                </a:solidFill>
+              </a:defRPr>
+            </a:pPr>
+            <a:r>
+              <a:t>• READ: Teacher Gradebook (/api/teacher/reports), Candidate Scorecards</a:t>
+            </a:r>
+          </a:p>
+          <a:p>
+            <a:pPr>
+              <a:spcBef>
+                <a:spcPts val="200"/>
+              </a:spcBef>
+              <a:defRPr sz="950">
+                <a:solidFill>
+                  <a:srgbClr val="FFFFFF"/>
+                </a:solidFill>
+              </a:defRPr>
+            </a:pPr>
+            <a:r>
+              <a:t>• UPDATE: Durable progress autosaving during active exam sessions</a:t>
+            </a:r>
+          </a:p>
+          <a:p>
+            <a:pPr>
+              <a:spcBef>
+                <a:spcPts val="200"/>
+              </a:spcBef>
+              <a:defRPr sz="950">
+                <a:solidFill>
+                  <a:srgbClr val="FFFFFF"/>
+                </a:solidFill>
+              </a:defRPr>
+            </a:pPr>
+            <a:r>
+              <a:t>• DELETE: Controlled audit retention purge</a:t>
+            </a:r>
+          </a:p>
+        </p:txBody>
+      </p:sp>
+      <p:sp>
+        <p:nvSpPr>
+          <p:cNvPr id="14" name="Rounded Rectangle 13"/>
+          <p:cNvSpPr/>
+          <p:nvPr/>
+        </p:nvSpPr>
+        <p:spPr>
+          <a:xfrm>
+            <a:off x="6172200" y="3977639"/>
+            <a:ext cx="5212080" cy="2148840"/>
+          </a:xfrm>
+          <a:prstGeom prst="roundRect">
+            <a:avLst/>
+          </a:prstGeom>
+          <a:solidFill>
+            <a:srgbClr val="1E293B"/>
+          </a:solidFill>
+          <a:ln w="12700">
+            <a:solidFill>
+              <a:srgbClr val="334155"/>
+            </a:solidFill>
+          </a:ln>
+        </p:spPr>
+        <p:style>
+          <a:lnRef idx="1">
+            <a:schemeClr val="accent1"/>
+          </a:lnRef>
+          <a:fillRef idx="3">
+            <a:schemeClr val="accent1"/>
+          </a:fillRef>
+          <a:effectRef idx="2">
+            <a:schemeClr val="accent1"/>
+          </a:effectRef>
+          <a:fontRef idx="minor">
+            <a:schemeClr val="lt1"/>
+          </a:fontRef>
+        </p:style>
+        <p:txBody>
+          <a:bodyPr rtlCol="0" anchor="ctr"/>
+          <a:lstStyle/>
+          <a:p>
+            <a:pPr algn="ctr"/>
+          </a:p>
+        </p:txBody>
+      </p:sp>
+      <p:sp>
+        <p:nvSpPr>
+          <p:cNvPr id="15" name="Rectangle 14"/>
+          <p:cNvSpPr/>
+          <p:nvPr/>
+        </p:nvSpPr>
+        <p:spPr>
+          <a:xfrm>
+            <a:off x="6172200" y="3977639"/>
+            <a:ext cx="5212080" cy="73152"/>
+          </a:xfrm>
+          <a:prstGeom prst="rect">
+            <a:avLst/>
+          </a:prstGeom>
+          <a:solidFill>
+            <a:srgbClr val="8B5CF6"/>
+          </a:solidFill>
+          <a:ln>
+            <a:noFill/>
+          </a:ln>
+        </p:spPr>
+        <p:style>
+          <a:lnRef idx="1">
+            <a:schemeClr val="accent1"/>
+          </a:lnRef>
+          <a:fillRef idx="3">
+            <a:schemeClr val="accent1"/>
+          </a:fillRef>
+          <a:effectRef idx="2">
+            <a:schemeClr val="accent1"/>
+          </a:effectRef>
+          <a:fontRef idx="minor">
+            <a:schemeClr val="lt1"/>
+          </a:fontRef>
+        </p:style>
+        <p:txBody>
+          <a:bodyPr rtlCol="0" anchor="ctr"/>
+          <a:lstStyle/>
+          <a:p>
+            <a:pPr algn="ctr"/>
+          </a:p>
+        </p:txBody>
+      </p:sp>
+      <p:sp>
+        <p:nvSpPr>
+          <p:cNvPr id="16" name="TextBox 15"/>
+          <p:cNvSpPr txBox="1"/>
+          <p:nvPr/>
+        </p:nvSpPr>
+        <p:spPr>
+          <a:xfrm>
+            <a:off x="6355080" y="4114799"/>
+            <a:ext cx="4846320" cy="1828800"/>
+          </a:xfrm>
+          <a:prstGeom prst="rect">
+            <a:avLst/>
+          </a:prstGeom>
+          <a:noFill/>
+        </p:spPr>
+        <p:txBody>
+          <a:bodyPr wrap="square">
+            <a:spAutoFit/>
+          </a:bodyPr>
+          <a:lstStyle/>
+          <a:p>
+            <a:pPr>
+              <a:spcAft>
+                <a:spcPts val="400"/>
+              </a:spcAft>
+              <a:defRPr sz="1100" b="1">
+                <a:solidFill>
+                  <a:srgbClr val="8B5CF6"/>
+                </a:solidFill>
+              </a:defRPr>
+            </a:pPr>
+            <a:r>
+              <a:t>BACKUPS &amp; REPORTS</a:t>
+            </a:r>
+          </a:p>
+          <a:p>
+            <a:pPr>
+              <a:spcBef>
+                <a:spcPts val="200"/>
+              </a:spcBef>
+              <a:defRPr sz="950">
+                <a:solidFill>
+                  <a:srgbClr val="FFFFFF"/>
+                </a:solidFill>
+              </a:defRPr>
+            </a:pPr>
+            <a:r>
+              <a:t>• CREATE: Automated timestamped snapshots in backups/ directory</a:t>
+            </a:r>
+          </a:p>
+          <a:p>
+            <a:pPr>
+              <a:spcBef>
+                <a:spcPts val="200"/>
+              </a:spcBef>
+              <a:defRPr sz="950">
+                <a:solidFill>
+                  <a:srgbClr val="FFFFFF"/>
+                </a:solidFill>
+              </a:defRPr>
+            </a:pPr>
+            <a:r>
+              <a:t>• READ: Stream CSV reports (/api/admin/export/users.csv &amp; submissions.csv)</a:t>
+            </a:r>
+          </a:p>
+          <a:p>
+            <a:pPr>
+              <a:spcBef>
+                <a:spcPts val="200"/>
+              </a:spcBef>
+              <a:defRPr sz="950">
+                <a:solidFill>
+                  <a:srgbClr val="FFFFFF"/>
+                </a:solidFill>
+              </a:defRPr>
+            </a:pPr>
+            <a:r>
+              <a:t>• UPDATE: Validate snapshot integrity against active database</a:t>
+            </a:r>
+          </a:p>
+          <a:p>
+            <a:pPr>
+              <a:spcBef>
+                <a:spcPts val="200"/>
+              </a:spcBef>
+              <a:defRPr sz="950">
+                <a:solidFill>
+                  <a:srgbClr val="FFFFFF"/>
+                </a:solidFill>
+              </a:defRPr>
+            </a:pPr>
+            <a:r>
+              <a:t>• DELETE: Rolling backup policy purging snapshots older than 30 days</a:t>
+            </a:r>
+          </a:p>
+        </p:txBody>
+      </p:sp>
+    </p:spTree>
+  </p:cSld>
+  <p:clrMapOvr>
+    <a:masterClrMapping/>
+  </p:clrMapOvr>
+</p:sld>
+</file>
+
+<file path=ppt/slides/slide12.xml><?xml version="1.0" encoding="utf-8"?>
+<p:sld xmlns:a="http://schemas.openxmlformats.org/drawingml/2006/main" xmlns:p="http://schemas.openxmlformats.org/presentationml/2006/main" xmlns:r="http://schemas.openxmlformats.org/officeDocument/2006/relationships">
+  <p:cSld>
+    <p:spTree>
+      <p:nvGrpSpPr>
+        <p:cNvPr id="1" name=""/>
+        <p:cNvGrpSpPr/>
+        <p:nvPr/>
+      </p:nvGrpSpPr>
+      <p:grpSpPr/>
+      <p:sp>
+        <p:nvSpPr>
+          <p:cNvPr id="2" name="Rectangle 1"/>
+          <p:cNvSpPr/>
+          <p:nvPr/>
+        </p:nvSpPr>
+        <p:spPr>
+          <a:xfrm>
+            <a:off x="0" y="0"/>
+            <a:ext cx="12191695" cy="6858000"/>
+          </a:xfrm>
+          <a:prstGeom prst="rect">
+            <a:avLst/>
+          </a:prstGeom>
+          <a:solidFill>
+            <a:srgbClr val="0F172A"/>
+          </a:solidFill>
+          <a:ln>
+            <a:noFill/>
+          </a:ln>
+        </p:spPr>
+        <p:style>
+          <a:lnRef idx="1">
+            <a:schemeClr val="accent1"/>
+          </a:lnRef>
+          <a:fillRef idx="3">
+            <a:schemeClr val="accent1"/>
+          </a:fillRef>
+          <a:effectRef idx="2">
+            <a:schemeClr val="accent1"/>
+          </a:effectRef>
+          <a:fontRef idx="minor">
+            <a:schemeClr val="lt1"/>
+          </a:fontRef>
+        </p:style>
+        <p:txBody>
+          <a:bodyPr rtlCol="0" anchor="ctr"/>
+          <a:lstStyle/>
+          <a:p>
+            <a:pPr algn="ctr"/>
+          </a:p>
+        </p:txBody>
+      </p:sp>
+      <p:sp>
+        <p:nvSpPr>
+          <p:cNvPr id="3" name="TextBox 2"/>
+          <p:cNvSpPr txBox="1"/>
+          <p:nvPr/>
+        </p:nvSpPr>
+        <p:spPr>
+          <a:xfrm>
+            <a:off x="731520" y="365760"/>
+            <a:ext cx="10698480" cy="365760"/>
+          </a:xfrm>
+          <a:prstGeom prst="rect">
+            <a:avLst/>
+          </a:prstGeom>
+          <a:noFill/>
+        </p:spPr>
+        <p:txBody>
+          <a:bodyPr wrap="square">
+            <a:spAutoFit/>
+          </a:bodyPr>
+          <a:lstStyle/>
+          <a:p>
+            <a:pPr>
+              <a:defRPr sz="1100" b="1">
+                <a:solidFill>
+                  <a:srgbClr val="3B82F6"/>
+                </a:solidFill>
+              </a:defRPr>
+            </a:pPr>
+            <a:r>
+              <a:t>REVIEW 1 — SETUP &amp; SRS</a:t>
+            </a:r>
+          </a:p>
+        </p:txBody>
+      </p:sp>
+      <p:sp>
+        <p:nvSpPr>
+          <p:cNvPr id="4" name="TextBox 3"/>
+          <p:cNvSpPr txBox="1"/>
+          <p:nvPr/>
+        </p:nvSpPr>
+        <p:spPr>
+          <a:xfrm>
+            <a:off x="731520" y="640080"/>
+            <a:ext cx="10698480" cy="731520"/>
+          </a:xfrm>
+          <a:prstGeom prst="rect">
+            <a:avLst/>
+          </a:prstGeom>
+          <a:noFill/>
+        </p:spPr>
+        <p:txBody>
+          <a:bodyPr wrap="square">
+            <a:spAutoFit/>
+          </a:bodyPr>
+          <a:lstStyle/>
+          <a:p>
+            <a:pPr>
+              <a:defRPr sz="2400" b="1">
+                <a:solidFill>
+                  <a:srgbClr val="FFFFFF"/>
+                </a:solidFill>
+              </a:defRPr>
+            </a:pPr>
+            <a:r>
+              <a:t>Working Application Demo Guide — Setup &amp; Test Credentials</a:t>
+            </a:r>
+          </a:p>
+        </p:txBody>
+      </p:sp>
+      <p:sp>
+        <p:nvSpPr>
+          <p:cNvPr id="5" name="Rounded Rectangle 4"/>
+          <p:cNvSpPr/>
+          <p:nvPr/>
+        </p:nvSpPr>
+        <p:spPr>
+          <a:xfrm>
+            <a:off x="731520" y="1645920"/>
+            <a:ext cx="5120640" cy="4480560"/>
+          </a:xfrm>
+          <a:prstGeom prst="roundRect">
+            <a:avLst/>
+          </a:prstGeom>
+          <a:solidFill>
+            <a:srgbClr val="1E293B"/>
+          </a:solidFill>
+          <a:ln w="12700">
+            <a:solidFill>
+              <a:srgbClr val="334155"/>
+            </a:solidFill>
+          </a:ln>
+        </p:spPr>
+        <p:style>
+          <a:lnRef idx="1">
+            <a:schemeClr val="accent1"/>
+          </a:lnRef>
+          <a:fillRef idx="3">
+            <a:schemeClr val="accent1"/>
+          </a:fillRef>
+          <a:effectRef idx="2">
+            <a:schemeClr val="accent1"/>
+          </a:effectRef>
+          <a:fontRef idx="minor">
+            <a:schemeClr val="lt1"/>
+          </a:fontRef>
+        </p:style>
+        <p:txBody>
+          <a:bodyPr rtlCol="0" anchor="ctr"/>
+          <a:lstStyle/>
+          <a:p>
+            <a:pPr algn="ctr"/>
+          </a:p>
+        </p:txBody>
+      </p:sp>
+      <p:sp>
+        <p:nvSpPr>
+          <p:cNvPr id="6" name="Rectangle 5"/>
+          <p:cNvSpPr/>
+          <p:nvPr/>
+        </p:nvSpPr>
+        <p:spPr>
+          <a:xfrm>
+            <a:off x="731520" y="1645920"/>
+            <a:ext cx="5120640" cy="73152"/>
+          </a:xfrm>
+          <a:prstGeom prst="rect">
+            <a:avLst/>
+          </a:prstGeom>
+          <a:solidFill>
+            <a:srgbClr val="3B82F6"/>
+          </a:solidFill>
+          <a:ln>
+            <a:noFill/>
+          </a:ln>
+        </p:spPr>
+        <p:style>
+          <a:lnRef idx="1">
+            <a:schemeClr val="accent1"/>
+          </a:lnRef>
+          <a:fillRef idx="3">
+            <a:schemeClr val="accent1"/>
+          </a:fillRef>
+          <a:effectRef idx="2">
+            <a:schemeClr val="accent1"/>
+          </a:effectRef>
+          <a:fontRef idx="minor">
+            <a:schemeClr val="lt1"/>
+          </a:fontRef>
+        </p:style>
+        <p:txBody>
+          <a:bodyPr rtlCol="0" anchor="ctr"/>
+          <a:lstStyle/>
+          <a:p>
+            <a:pPr algn="ctr"/>
+          </a:p>
+        </p:txBody>
+      </p:sp>
+      <p:sp>
+        <p:nvSpPr>
+          <p:cNvPr id="7" name="TextBox 6"/>
+          <p:cNvSpPr txBox="1"/>
+          <p:nvPr/>
+        </p:nvSpPr>
+        <p:spPr>
+          <a:xfrm>
+            <a:off x="914400" y="1828800"/>
+            <a:ext cx="4754880" cy="4114800"/>
+          </a:xfrm>
+          <a:prstGeom prst="rect">
+            <a:avLst/>
+          </a:prstGeom>
+          <a:noFill/>
+        </p:spPr>
+        <p:txBody>
+          <a:bodyPr wrap="square">
+            <a:spAutoFit/>
+          </a:bodyPr>
+          <a:lstStyle/>
+          <a:p>
+            <a:pPr>
+              <a:spcAft>
+                <a:spcPts val="1000"/>
+              </a:spcAft>
+              <a:defRPr sz="1200" b="1">
+                <a:solidFill>
+                  <a:srgbClr val="3B82F6"/>
+                </a:solidFill>
+              </a:defRPr>
+            </a:pPr>
+            <a:r>
+              <a:t>EXECUTION &amp; VERIFICATION COMMANDS</a:t>
+            </a:r>
+          </a:p>
+          <a:p>
+            <a:pPr>
+              <a:spcBef>
+                <a:spcPts val="600"/>
+              </a:spcBef>
+              <a:defRPr b="1" sz="1050">
+                <a:solidFill>
+                  <a:srgbClr val="FFFFFF"/>
+                </a:solidFill>
+              </a:defRPr>
+            </a:pPr>
+            <a:r>
+              <a:t>▶ 1. Launch Web Server:</a:t>
+            </a:r>
+          </a:p>
+          <a:p>
+            <a:pPr>
+              <a:defRPr sz="950">
+                <a:solidFill>
+                  <a:srgbClr val="CBD5E1"/>
+                </a:solidFill>
+              </a:defRPr>
+            </a:pPr>
+            <a:r>
+              <a:t>   python server.py</a:t>
+            </a:r>
+            <a:br/>
+            <a:r>
+              <a:t>Binds to http://localhost:8000 with real-time reload &amp; lifespan initialization.</a:t>
+            </a:r>
+          </a:p>
+          <a:p>
+            <a:pPr>
+              <a:spcBef>
+                <a:spcPts val="600"/>
+              </a:spcBef>
+              <a:defRPr b="1" sz="1050">
+                <a:solidFill>
+                  <a:srgbClr val="FFFFFF"/>
+                </a:solidFill>
+              </a:defRPr>
+            </a:pPr>
+            <a:r>
+              <a:t>▶ 2. Launch Desktop GUI:</a:t>
+            </a:r>
+          </a:p>
+          <a:p>
+            <a:pPr>
+              <a:defRPr sz="950">
+                <a:solidFill>
+                  <a:srgbClr val="CBD5E1"/>
+                </a:solidFill>
+              </a:defRPr>
+            </a:pPr>
+            <a:r>
+              <a:t>   python desktop_app.py</a:t>
+            </a:r>
+            <a:br/>
+            <a:r>
+              <a:t>Native Windows CustomTkinter application with strict grid alignment.</a:t>
+            </a:r>
+          </a:p>
+          <a:p>
+            <a:pPr>
+              <a:spcBef>
+                <a:spcPts val="600"/>
+              </a:spcBef>
+              <a:defRPr b="1" sz="1050">
+                <a:solidFill>
+                  <a:srgbClr val="FFFFFF"/>
+                </a:solidFill>
+              </a:defRPr>
+            </a:pPr>
+            <a:r>
+              <a:t>▶ 3. Run Test Suite:</a:t>
+            </a:r>
+          </a:p>
+          <a:p>
+            <a:pPr>
+              <a:defRPr sz="950">
+                <a:solidFill>
+                  <a:srgbClr val="CBD5E1"/>
+                </a:solidFill>
+              </a:defRPr>
+            </a:pPr>
+            <a:r>
+              <a:t>   python -m pytest tests/ -v</a:t>
+            </a:r>
+            <a:br/>
+            <a:r>
+              <a:t>Runs all 22 automated tests verifying auth, join codes, and admin analytics.</a:t>
+            </a:r>
+          </a:p>
+        </p:txBody>
+      </p:sp>
+      <p:sp>
+        <p:nvSpPr>
+          <p:cNvPr id="8" name="Rounded Rectangle 7"/>
+          <p:cNvSpPr/>
+          <p:nvPr/>
+        </p:nvSpPr>
+        <p:spPr>
+          <a:xfrm>
+            <a:off x="6217920" y="1645920"/>
+            <a:ext cx="5212080" cy="4480560"/>
+          </a:xfrm>
+          <a:prstGeom prst="roundRect">
+            <a:avLst/>
+          </a:prstGeom>
+          <a:solidFill>
+            <a:srgbClr val="1E293B"/>
+          </a:solidFill>
+          <a:ln w="12700">
+            <a:solidFill>
+              <a:srgbClr val="334155"/>
+            </a:solidFill>
+          </a:ln>
+        </p:spPr>
+        <p:style>
+          <a:lnRef idx="1">
+            <a:schemeClr val="accent1"/>
+          </a:lnRef>
+          <a:fillRef idx="3">
+            <a:schemeClr val="accent1"/>
+          </a:fillRef>
+          <a:effectRef idx="2">
+            <a:schemeClr val="accent1"/>
+          </a:effectRef>
+          <a:fontRef idx="minor">
+            <a:schemeClr val="lt1"/>
+          </a:fontRef>
+        </p:style>
+        <p:txBody>
+          <a:bodyPr rtlCol="0" anchor="ctr"/>
+          <a:lstStyle/>
+          <a:p>
+            <a:pPr algn="ctr"/>
+          </a:p>
+        </p:txBody>
+      </p:sp>
+      <p:sp>
+        <p:nvSpPr>
+          <p:cNvPr id="9" name="Rectangle 8"/>
+          <p:cNvSpPr/>
+          <p:nvPr/>
+        </p:nvSpPr>
+        <p:spPr>
+          <a:xfrm>
+            <a:off x="6217920" y="1645920"/>
+            <a:ext cx="5212080" cy="73152"/>
+          </a:xfrm>
+          <a:prstGeom prst="rect">
+            <a:avLst/>
+          </a:prstGeom>
+          <a:solidFill>
+            <a:srgbClr val="10B981"/>
+          </a:solidFill>
+          <a:ln>
+            <a:noFill/>
+          </a:ln>
+        </p:spPr>
+        <p:style>
+          <a:lnRef idx="1">
+            <a:schemeClr val="accent1"/>
+          </a:lnRef>
+          <a:fillRef idx="3">
+            <a:schemeClr val="accent1"/>
+          </a:fillRef>
+          <a:effectRef idx="2">
+            <a:schemeClr val="accent1"/>
+          </a:effectRef>
+          <a:fontRef idx="minor">
+            <a:schemeClr val="lt1"/>
+          </a:fontRef>
+        </p:style>
+        <p:txBody>
+          <a:bodyPr rtlCol="0" anchor="ctr"/>
+          <a:lstStyle/>
+          <a:p>
+            <a:pPr algn="ctr"/>
+          </a:p>
+        </p:txBody>
+      </p:sp>
+      <p:sp>
+        <p:nvSpPr>
+          <p:cNvPr id="10" name="TextBox 9"/>
+          <p:cNvSpPr txBox="1"/>
+          <p:nvPr/>
+        </p:nvSpPr>
+        <p:spPr>
+          <a:xfrm>
+            <a:off x="6400800" y="1828800"/>
+            <a:ext cx="4846320" cy="4114800"/>
+          </a:xfrm>
+          <a:prstGeom prst="rect">
+            <a:avLst/>
+          </a:prstGeom>
+          <a:noFill/>
+        </p:spPr>
+        <p:txBody>
+          <a:bodyPr wrap="square">
+            <a:spAutoFit/>
+          </a:bodyPr>
+          <a:lstStyle/>
+          <a:p>
+            <a:pPr>
+              <a:spcAft>
+                <a:spcPts val="1000"/>
+              </a:spcAft>
+              <a:defRPr sz="1200" b="1">
+                <a:solidFill>
+                  <a:srgbClr val="10B981"/>
+                </a:solidFill>
+              </a:defRPr>
+            </a:pPr>
+            <a:r>
+              <a:t>READY-TO-USE TEST ACCOUNTS</a:t>
+            </a:r>
+          </a:p>
+          <a:p>
+            <a:pPr>
+              <a:spcBef>
+                <a:spcPts val="600"/>
+              </a:spcBef>
+              <a:defRPr b="1" sz="1000">
+                <a:solidFill>
+                  <a:srgbClr val="3B82F6"/>
+                </a:solidFill>
+              </a:defRPr>
+            </a:pPr>
+            <a:r>
+              <a:t>👤 STUDENT ROLE — Alex Mercer ()</a:t>
+            </a:r>
+          </a:p>
+          <a:p>
+            <a:pPr>
+              <a:defRPr sz="950" b="1">
+                <a:solidFill>
+                  <a:srgbClr val="FFFFFF"/>
+                </a:solidFill>
+              </a:defRPr>
+            </a:pPr>
+            <a:r>
+              <a:t>   Login: student  |  Password: student123</a:t>
+            </a:r>
+          </a:p>
+          <a:p>
+            <a:pPr>
+              <a:defRPr sz="900">
+                <a:solidFill>
+                  <a:srgbClr val="CBD5E1"/>
+                </a:solidFill>
+              </a:defRPr>
+            </a:pPr>
+            <a:r>
+              <a:t>   Purpose: Candidate Arena: Join assessment via code 'QZ-1001', test anti-cheat, instant scorecard.</a:t>
+            </a:r>
+          </a:p>
+          <a:p>
+            <a:pPr>
+              <a:spcBef>
+                <a:spcPts val="600"/>
+              </a:spcBef>
+              <a:defRPr b="1" sz="1000">
+                <a:solidFill>
+                  <a:srgbClr val="10B981"/>
+                </a:solidFill>
+              </a:defRPr>
+            </a:pPr>
+            <a:r>
+              <a:t>👤 FACULTY ROLE — Prof. Alan Turing ()</a:t>
+            </a:r>
+          </a:p>
+          <a:p>
+            <a:pPr>
+              <a:defRPr sz="950" b="1">
+                <a:solidFill>
+                  <a:srgbClr val="FFFFFF"/>
+                </a:solidFill>
+              </a:defRPr>
+            </a:pPr>
+            <a:r>
+              <a:t>   Login: faculty  |  Password: faculty123</a:t>
+            </a:r>
+          </a:p>
+          <a:p>
+            <a:pPr>
+              <a:defRPr sz="900">
+                <a:solidFill>
+                  <a:srgbClr val="CBD5E1"/>
+                </a:solidFill>
+              </a:defRPr>
+            </a:pPr>
+            <a:r>
+              <a:t>   Purpose: Examiner Studio: Manual quiz builder, AI quiz generator, class submission gradebook.</a:t>
+            </a:r>
+          </a:p>
+          <a:p>
+            <a:pPr>
+              <a:spcBef>
+                <a:spcPts val="600"/>
+              </a:spcBef>
+              <a:defRPr b="1" sz="1000">
+                <a:solidFill>
+                  <a:srgbClr val="8B5CF6"/>
+                </a:solidFill>
+              </a:defRPr>
+            </a:pPr>
+            <a:r>
+              <a:t>👤 ADMIN ROLE — System Administrator ()</a:t>
+            </a:r>
+          </a:p>
+          <a:p>
+            <a:pPr>
+              <a:defRPr sz="950" b="1">
+                <a:solidFill>
+                  <a:srgbClr val="FFFFFF"/>
+                </a:solidFill>
+              </a:defRPr>
+            </a:pPr>
+            <a:r>
+              <a:t>   Login: admin  |  Password: admin123</a:t>
+            </a:r>
+          </a:p>
+          <a:p>
+            <a:pPr>
+              <a:defRPr sz="900">
+                <a:solidFill>
+                  <a:srgbClr val="CBD5E1"/>
+                </a:solidFill>
+              </a:defRPr>
+            </a:pPr>
+            <a:r>
+              <a:t>   Purpose: Platform Admin: Global telemetry KPIs, candidate history modal, and CSV exports.</a:t>
+            </a:r>
+          </a:p>
+        </p:txBody>
+      </p:sp>
+    </p:spTree>
+  </p:cSld>
+  <p:clrMapOvr>
+    <a:masterClrMapping/>
+  </p:clrMapOvr>
+</p:sld>
+</file>
+
+<file path=ppt/slides/slide13.xml><?xml version="1.0" encoding="utf-8"?>
+<p:sld xmlns:a="http://schemas.openxmlformats.org/drawingml/2006/main" xmlns:p="http://schemas.openxmlformats.org/presentationml/2006/main" xmlns:r="http://schemas.openxmlformats.org/officeDocument/2006/relationships">
+  <p:cSld>
+    <p:spTree>
+      <p:nvGrpSpPr>
+        <p:cNvPr id="1" name=""/>
+        <p:cNvGrpSpPr/>
+        <p:nvPr/>
+      </p:nvGrpSpPr>
+      <p:grpSpPr/>
+      <p:sp>
+        <p:nvSpPr>
+          <p:cNvPr id="2" name="Rectangle 1"/>
+          <p:cNvSpPr/>
+          <p:nvPr/>
+        </p:nvSpPr>
+        <p:spPr>
+          <a:xfrm>
+            <a:off x="0" y="0"/>
+            <a:ext cx="12191695" cy="6858000"/>
+          </a:xfrm>
+          <a:prstGeom prst="rect">
+            <a:avLst/>
+          </a:prstGeom>
+          <a:solidFill>
+            <a:srgbClr val="0F172A"/>
+          </a:solidFill>
+          <a:ln>
+            <a:noFill/>
+          </a:ln>
+        </p:spPr>
+        <p:style>
+          <a:lnRef idx="1">
+            <a:schemeClr val="accent1"/>
+          </a:lnRef>
+          <a:fillRef idx="3">
+            <a:schemeClr val="accent1"/>
+          </a:fillRef>
+          <a:effectRef idx="2">
+            <a:schemeClr val="accent1"/>
+          </a:effectRef>
+          <a:fontRef idx="minor">
+            <a:schemeClr val="lt1"/>
+          </a:fontRef>
+        </p:style>
+        <p:txBody>
+          <a:bodyPr rtlCol="0" anchor="ctr"/>
+          <a:lstStyle/>
+          <a:p>
+            <a:pPr algn="ctr"/>
+          </a:p>
+        </p:txBody>
+      </p:sp>
+      <p:sp>
+        <p:nvSpPr>
+          <p:cNvPr id="3" name="TextBox 2"/>
+          <p:cNvSpPr txBox="1"/>
+          <p:nvPr/>
+        </p:nvSpPr>
+        <p:spPr>
+          <a:xfrm>
+            <a:off x="731520" y="365760"/>
+            <a:ext cx="10698480" cy="365760"/>
+          </a:xfrm>
+          <a:prstGeom prst="rect">
+            <a:avLst/>
+          </a:prstGeom>
+          <a:noFill/>
+        </p:spPr>
+        <p:txBody>
+          <a:bodyPr wrap="square">
+            <a:spAutoFit/>
+          </a:bodyPr>
+          <a:lstStyle/>
+          <a:p>
+            <a:pPr>
+              <a:defRPr sz="1100" b="1">
+                <a:solidFill>
+                  <a:srgbClr val="3B82F6"/>
+                </a:solidFill>
+              </a:defRPr>
+            </a:pPr>
+            <a:r>
+              <a:t>REVIEW 1 — SETUP &amp; SRS</a:t>
+            </a:r>
+          </a:p>
+        </p:txBody>
+      </p:sp>
+      <p:sp>
+        <p:nvSpPr>
+          <p:cNvPr id="4" name="TextBox 3"/>
+          <p:cNvSpPr txBox="1"/>
+          <p:nvPr/>
+        </p:nvSpPr>
+        <p:spPr>
+          <a:xfrm>
+            <a:off x="731520" y="640080"/>
+            <a:ext cx="10698480" cy="731520"/>
+          </a:xfrm>
+          <a:prstGeom prst="rect">
+            <a:avLst/>
+          </a:prstGeom>
+          <a:noFill/>
+        </p:spPr>
+        <p:txBody>
+          <a:bodyPr wrap="square">
+            <a:spAutoFit/>
+          </a:bodyPr>
+          <a:lstStyle/>
+          <a:p>
+            <a:pPr>
+              <a:defRPr sz="2400" b="1">
+                <a:solidFill>
+                  <a:srgbClr val="FFFFFF"/>
+                </a:solidFill>
+              </a:defRPr>
+            </a:pPr>
+            <a:r>
+              <a:t>Live Demonstration Walkthroughs (Student, Faculty, Admin)</a:t>
+            </a:r>
+          </a:p>
+        </p:txBody>
+      </p:sp>
+      <p:sp>
+        <p:nvSpPr>
+          <p:cNvPr id="5" name="Rounded Rectangle 4"/>
+          <p:cNvSpPr/>
+          <p:nvPr/>
+        </p:nvSpPr>
+        <p:spPr>
+          <a:xfrm>
+            <a:off x="731520" y="1645920"/>
+            <a:ext cx="3474720" cy="4480560"/>
+          </a:xfrm>
+          <a:prstGeom prst="roundRect">
+            <a:avLst/>
+          </a:prstGeom>
+          <a:solidFill>
+            <a:srgbClr val="1E293B"/>
+          </a:solidFill>
+          <a:ln w="12700">
+            <a:solidFill>
+              <a:srgbClr val="334155"/>
+            </a:solidFill>
+          </a:ln>
+        </p:spPr>
+        <p:style>
+          <a:lnRef idx="1">
+            <a:schemeClr val="accent1"/>
+          </a:lnRef>
+          <a:fillRef idx="3">
+            <a:schemeClr val="accent1"/>
+          </a:fillRef>
+          <a:effectRef idx="2">
+            <a:schemeClr val="accent1"/>
+          </a:effectRef>
+          <a:fontRef idx="minor">
+            <a:schemeClr val="lt1"/>
+          </a:fontRef>
+        </p:style>
+        <p:txBody>
+          <a:bodyPr rtlCol="0" anchor="ctr"/>
+          <a:lstStyle/>
+          <a:p>
+            <a:pPr algn="ctr"/>
+          </a:p>
+        </p:txBody>
+      </p:sp>
+      <p:sp>
+        <p:nvSpPr>
+          <p:cNvPr id="6" name="Rectangle 5"/>
+          <p:cNvSpPr/>
+          <p:nvPr/>
+        </p:nvSpPr>
+        <p:spPr>
+          <a:xfrm>
+            <a:off x="731520" y="1645920"/>
+            <a:ext cx="3474720" cy="73152"/>
+          </a:xfrm>
+          <a:prstGeom prst="rect">
+            <a:avLst/>
+          </a:prstGeom>
+          <a:solidFill>
+            <a:srgbClr val="3B82F6"/>
+          </a:solidFill>
+          <a:ln>
+            <a:noFill/>
+          </a:ln>
+        </p:spPr>
+        <p:style>
+          <a:lnRef idx="1">
+            <a:schemeClr val="accent1"/>
+          </a:lnRef>
+          <a:fillRef idx="3">
+            <a:schemeClr val="accent1"/>
+          </a:fillRef>
+          <a:effectRef idx="2">
+            <a:schemeClr val="accent1"/>
+          </a:effectRef>
+          <a:fontRef idx="minor">
+            <a:schemeClr val="lt1"/>
+          </a:fontRef>
+        </p:style>
+        <p:txBody>
+          <a:bodyPr rtlCol="0" anchor="ctr"/>
+          <a:lstStyle/>
+          <a:p>
+            <a:pPr algn="ctr"/>
+          </a:p>
+        </p:txBody>
+      </p:sp>
+      <p:sp>
+        <p:nvSpPr>
+          <p:cNvPr id="7" name="TextBox 6"/>
+          <p:cNvSpPr txBox="1"/>
+          <p:nvPr/>
+        </p:nvSpPr>
+        <p:spPr>
+          <a:xfrm>
+            <a:off x="914400" y="1828800"/>
+            <a:ext cx="3108960" cy="4114800"/>
+          </a:xfrm>
+          <a:prstGeom prst="rect">
+            <a:avLst/>
+          </a:prstGeom>
+          <a:noFill/>
+        </p:spPr>
+        <p:txBody>
+          <a:bodyPr wrap="square">
+            <a:spAutoFit/>
+          </a:bodyPr>
+          <a:lstStyle/>
+          <a:p>
+            <a:pPr>
+              <a:spcAft>
+                <a:spcPts val="1000"/>
+              </a:spcAft>
+              <a:defRPr sz="1100" b="1">
+                <a:solidFill>
+                  <a:srgbClr val="3B82F6"/>
+                </a:solidFill>
+              </a:defRPr>
+            </a:pPr>
+            <a:r>
+              <a:t>SCENARIO 1: STUDENT EXAMINATION</a:t>
+            </a:r>
+          </a:p>
+          <a:p>
+            <a:pPr>
+              <a:spcBef>
+                <a:spcPts val="500"/>
+              </a:spcBef>
+              <a:defRPr sz="950">
+                <a:solidFill>
+                  <a:srgbClr val="FFFFFF"/>
+                </a:solidFill>
+              </a:defRPr>
+            </a:pPr>
+            <a:r>
+              <a:t>1. Sign in as student / student123; navigation tabs restrict to Candidate Arena</a:t>
+            </a:r>
+          </a:p>
+          <a:p>
+            <a:pPr>
+              <a:spcBef>
+                <a:spcPts val="500"/>
+              </a:spcBef>
+              <a:defRPr sz="950">
+                <a:solidFill>
+                  <a:srgbClr val="FFFFFF"/>
+                </a:solidFill>
+              </a:defRPr>
+            </a:pPr>
+            <a:r>
+              <a:t>2. Enter active Join Code 'QZ-1001' and launch assessment</a:t>
+            </a:r>
+          </a:p>
+          <a:p>
+            <a:pPr>
+              <a:spcBef>
+                <a:spcPts val="500"/>
+              </a:spcBef>
+              <a:defRPr sz="950">
+                <a:solidFill>
+                  <a:srgbClr val="FFFFFF"/>
+                </a:solidFill>
+              </a:defRPr>
+            </a:pPr>
+            <a:r>
+              <a:t>3. Answer questions while authoritative countdown timer runs</a:t>
+            </a:r>
+          </a:p>
+          <a:p>
+            <a:pPr>
+              <a:spcBef>
+                <a:spcPts val="500"/>
+              </a:spcBef>
+              <a:defRPr sz="950">
+                <a:solidFill>
+                  <a:srgbClr val="FFFFFF"/>
+                </a:solidFill>
+              </a:defRPr>
+            </a:pPr>
+            <a:r>
+              <a:t>4. Switch browser tabs to trigger live Anti-Cheat violation alert</a:t>
+            </a:r>
+          </a:p>
+          <a:p>
+            <a:pPr>
+              <a:spcBef>
+                <a:spcPts val="500"/>
+              </a:spcBef>
+              <a:defRPr sz="950">
+                <a:solidFill>
+                  <a:srgbClr val="FFFFFF"/>
+                </a:solidFill>
+              </a:defRPr>
+            </a:pPr>
+            <a:r>
+              <a:t>5. Submit test; zero-latency auto-grading delivers scorecard in ~25ms</a:t>
+            </a:r>
+          </a:p>
+        </p:txBody>
+      </p:sp>
+      <p:sp>
+        <p:nvSpPr>
+          <p:cNvPr id="8" name="Rounded Rectangle 7"/>
+          <p:cNvSpPr/>
+          <p:nvPr/>
+        </p:nvSpPr>
+        <p:spPr>
+          <a:xfrm>
+            <a:off x="4343400" y="1645920"/>
+            <a:ext cx="3474720" cy="4480560"/>
+          </a:xfrm>
+          <a:prstGeom prst="roundRect">
+            <a:avLst/>
+          </a:prstGeom>
+          <a:solidFill>
+            <a:srgbClr val="1E293B"/>
+          </a:solidFill>
+          <a:ln w="12700">
+            <a:solidFill>
+              <a:srgbClr val="334155"/>
+            </a:solidFill>
+          </a:ln>
+        </p:spPr>
+        <p:style>
+          <a:lnRef idx="1">
+            <a:schemeClr val="accent1"/>
+          </a:lnRef>
+          <a:fillRef idx="3">
+            <a:schemeClr val="accent1"/>
+          </a:fillRef>
+          <a:effectRef idx="2">
+            <a:schemeClr val="accent1"/>
+          </a:effectRef>
+          <a:fontRef idx="minor">
+            <a:schemeClr val="lt1"/>
+          </a:fontRef>
+        </p:style>
+        <p:txBody>
+          <a:bodyPr rtlCol="0" anchor="ctr"/>
+          <a:lstStyle/>
+          <a:p>
+            <a:pPr algn="ctr"/>
+          </a:p>
+        </p:txBody>
+      </p:sp>
+      <p:sp>
+        <p:nvSpPr>
+          <p:cNvPr id="9" name="Rectangle 8"/>
+          <p:cNvSpPr/>
+          <p:nvPr/>
+        </p:nvSpPr>
+        <p:spPr>
+          <a:xfrm>
+            <a:off x="4343400" y="1645920"/>
+            <a:ext cx="3474720" cy="73152"/>
+          </a:xfrm>
+          <a:prstGeom prst="rect">
+            <a:avLst/>
+          </a:prstGeom>
+          <a:solidFill>
+            <a:srgbClr val="10B981"/>
+          </a:solidFill>
+          <a:ln>
+            <a:noFill/>
+          </a:ln>
+        </p:spPr>
+        <p:style>
+          <a:lnRef idx="1">
+            <a:schemeClr val="accent1"/>
+          </a:lnRef>
+          <a:fillRef idx="3">
+            <a:schemeClr val="accent1"/>
+          </a:fillRef>
+          <a:effectRef idx="2">
+            <a:schemeClr val="accent1"/>
+          </a:effectRef>
+          <a:fontRef idx="minor">
+            <a:schemeClr val="lt1"/>
+          </a:fontRef>
+        </p:style>
+        <p:txBody>
+          <a:bodyPr rtlCol="0" anchor="ctr"/>
+          <a:lstStyle/>
+          <a:p>
+            <a:pPr algn="ctr"/>
+          </a:p>
+        </p:txBody>
+      </p:sp>
+      <p:sp>
+        <p:nvSpPr>
+          <p:cNvPr id="10" name="TextBox 9"/>
+          <p:cNvSpPr txBox="1"/>
+          <p:nvPr/>
+        </p:nvSpPr>
+        <p:spPr>
+          <a:xfrm>
+            <a:off x="4526280" y="1828800"/>
+            <a:ext cx="3108960" cy="4114800"/>
+          </a:xfrm>
+          <a:prstGeom prst="rect">
+            <a:avLst/>
+          </a:prstGeom>
+          <a:noFill/>
+        </p:spPr>
+        <p:txBody>
+          <a:bodyPr wrap="square">
+            <a:spAutoFit/>
+          </a:bodyPr>
+          <a:lstStyle/>
+          <a:p>
+            <a:pPr>
+              <a:spcAft>
+                <a:spcPts val="1000"/>
+              </a:spcAft>
+              <a:defRPr sz="1100" b="1">
+                <a:solidFill>
+                  <a:srgbClr val="10B981"/>
+                </a:solidFill>
+              </a:defRPr>
+            </a:pPr>
+            <a:r>
+              <a:t>SCENARIO 2: FACULTY STUDIO &amp; AI</a:t>
+            </a:r>
+          </a:p>
+          <a:p>
+            <a:pPr>
+              <a:spcBef>
+                <a:spcPts val="500"/>
+              </a:spcBef>
+              <a:defRPr sz="950">
+                <a:solidFill>
+                  <a:srgbClr val="FFFFFF"/>
+                </a:solidFill>
+              </a:defRPr>
+            </a:pPr>
+            <a:r>
+              <a:t>1. Sign in as faculty / faculty123; Examiner Studio is front and center</a:t>
+            </a:r>
+          </a:p>
+          <a:p>
+            <a:pPr>
+              <a:spcBef>
+                <a:spcPts val="500"/>
+              </a:spcBef>
+              <a:defRPr sz="950">
+                <a:solidFill>
+                  <a:srgbClr val="FFFFFF"/>
+                </a:solidFill>
+              </a:defRPr>
+            </a:pPr>
+            <a:r>
+              <a:t>2. Open AI Question Generator, enter topic 'Data Structures', click Generate</a:t>
+            </a:r>
+          </a:p>
+          <a:p>
+            <a:pPr>
+              <a:spcBef>
+                <a:spcPts val="500"/>
+              </a:spcBef>
+              <a:defRPr sz="950">
+                <a:solidFill>
+                  <a:srgbClr val="FFFFFF"/>
+                </a:solidFill>
+              </a:defRPr>
+            </a:pPr>
+            <a:r>
+              <a:t>3. Set passing score to 70%, 15m duration, click Publish Quiz</a:t>
+            </a:r>
+          </a:p>
+          <a:p>
+            <a:pPr>
+              <a:spcBef>
+                <a:spcPts val="500"/>
+              </a:spcBef>
+              <a:defRPr sz="950">
+                <a:solidFill>
+                  <a:srgbClr val="FFFFFF"/>
+                </a:solidFill>
+              </a:defRPr>
+            </a:pPr>
+            <a:r>
+              <a:t>4. System creates new 6-char Join Code (e.g. QZ-3942)</a:t>
+            </a:r>
+          </a:p>
+          <a:p>
+            <a:pPr>
+              <a:spcBef>
+                <a:spcPts val="500"/>
+              </a:spcBef>
+              <a:defRPr sz="950">
+                <a:solidFill>
+                  <a:srgbClr val="FFFFFF"/>
+                </a:solidFill>
+              </a:defRPr>
+            </a:pPr>
+            <a:r>
+              <a:t>5. Open Class Gradebook to inspect student attempts and proctor violation counts</a:t>
+            </a:r>
+          </a:p>
+        </p:txBody>
+      </p:sp>
+      <p:sp>
+        <p:nvSpPr>
+          <p:cNvPr id="11" name="Rounded Rectangle 10"/>
+          <p:cNvSpPr/>
+          <p:nvPr/>
+        </p:nvSpPr>
+        <p:spPr>
+          <a:xfrm>
+            <a:off x="7955280" y="1645920"/>
+            <a:ext cx="3474720" cy="4480560"/>
+          </a:xfrm>
+          <a:prstGeom prst="roundRect">
+            <a:avLst/>
+          </a:prstGeom>
+          <a:solidFill>
+            <a:srgbClr val="1E293B"/>
+          </a:solidFill>
+          <a:ln w="12700">
+            <a:solidFill>
+              <a:srgbClr val="334155"/>
+            </a:solidFill>
+          </a:ln>
+        </p:spPr>
+        <p:style>
+          <a:lnRef idx="1">
+            <a:schemeClr val="accent1"/>
+          </a:lnRef>
+          <a:fillRef idx="3">
+            <a:schemeClr val="accent1"/>
+          </a:fillRef>
+          <a:effectRef idx="2">
+            <a:schemeClr val="accent1"/>
+          </a:effectRef>
+          <a:fontRef idx="minor">
+            <a:schemeClr val="lt1"/>
+          </a:fontRef>
+        </p:style>
+        <p:txBody>
+          <a:bodyPr rtlCol="0" anchor="ctr"/>
+          <a:lstStyle/>
+          <a:p>
+            <a:pPr algn="ctr"/>
+          </a:p>
+        </p:txBody>
+      </p:sp>
+      <p:sp>
+        <p:nvSpPr>
+          <p:cNvPr id="12" name="Rectangle 11"/>
+          <p:cNvSpPr/>
+          <p:nvPr/>
+        </p:nvSpPr>
+        <p:spPr>
+          <a:xfrm>
+            <a:off x="7955280" y="1645920"/>
+            <a:ext cx="3474720" cy="73152"/>
+          </a:xfrm>
+          <a:prstGeom prst="rect">
+            <a:avLst/>
+          </a:prstGeom>
+          <a:solidFill>
+            <a:srgbClr val="8B5CF6"/>
+          </a:solidFill>
+          <a:ln>
+            <a:noFill/>
+          </a:ln>
+        </p:spPr>
+        <p:style>
+          <a:lnRef idx="1">
+            <a:schemeClr val="accent1"/>
+          </a:lnRef>
+          <a:fillRef idx="3">
+            <a:schemeClr val="accent1"/>
+          </a:fillRef>
+          <a:effectRef idx="2">
+            <a:schemeClr val="accent1"/>
+          </a:effectRef>
+          <a:fontRef idx="minor">
+            <a:schemeClr val="lt1"/>
+          </a:fontRef>
+        </p:style>
+        <p:txBody>
+          <a:bodyPr rtlCol="0" anchor="ctr"/>
+          <a:lstStyle/>
+          <a:p>
+            <a:pPr algn="ctr"/>
+          </a:p>
+        </p:txBody>
+      </p:sp>
+      <p:sp>
+        <p:nvSpPr>
+          <p:cNvPr id="13" name="TextBox 12"/>
+          <p:cNvSpPr txBox="1"/>
+          <p:nvPr/>
+        </p:nvSpPr>
+        <p:spPr>
+          <a:xfrm>
+            <a:off x="8138160" y="1828800"/>
+            <a:ext cx="3108960" cy="4114800"/>
+          </a:xfrm>
+          <a:prstGeom prst="rect">
+            <a:avLst/>
+          </a:prstGeom>
+          <a:noFill/>
+        </p:spPr>
+        <p:txBody>
+          <a:bodyPr wrap="square">
+            <a:spAutoFit/>
+          </a:bodyPr>
+          <a:lstStyle/>
+          <a:p>
+            <a:pPr>
+              <a:spcAft>
+                <a:spcPts val="1000"/>
+              </a:spcAft>
+              <a:defRPr sz="1100" b="1">
+                <a:solidFill>
+                  <a:srgbClr val="8B5CF6"/>
+                </a:solidFill>
+              </a:defRPr>
+            </a:pPr>
+            <a:r>
+              <a:t>SCENARIO 3: ADMIN GOVERNANCE</a:t>
+            </a:r>
+          </a:p>
+          <a:p>
+            <a:pPr>
+              <a:spcBef>
+                <a:spcPts val="500"/>
+              </a:spcBef>
+              <a:defRPr sz="950">
+                <a:solidFill>
+                  <a:srgbClr val="FFFFFF"/>
+                </a:solidFill>
+              </a:defRPr>
+            </a:pPr>
+            <a:r>
+              <a:t>1. Sign in as admin / admin123; open Platform Administration Console</a:t>
+            </a:r>
+          </a:p>
+          <a:p>
+            <a:pPr>
+              <a:spcBef>
+                <a:spcPts val="500"/>
+              </a:spcBef>
+              <a:defRPr sz="950">
+                <a:solidFill>
+                  <a:srgbClr val="FFFFFF"/>
+                </a:solidFill>
+              </a:defRPr>
+            </a:pPr>
+            <a:r>
+              <a:t>2. Inspect high-level KPIs (Total accounts, candidates, faculty, violations)</a:t>
+            </a:r>
+          </a:p>
+          <a:p>
+            <a:pPr>
+              <a:spcBef>
+                <a:spcPts val="500"/>
+              </a:spcBef>
+              <a:defRPr sz="950">
+                <a:solidFill>
+                  <a:srgbClr val="FFFFFF"/>
+                </a:solidFill>
+              </a:defRPr>
+            </a:pPr>
+            <a:r>
+              <a:t>3. Filter user roster table by role or search string 'Alex Mercer'</a:t>
+            </a:r>
+          </a:p>
+          <a:p>
+            <a:pPr>
+              <a:spcBef>
+                <a:spcPts val="500"/>
+              </a:spcBef>
+              <a:defRPr sz="950">
+                <a:solidFill>
+                  <a:srgbClr val="FFFFFF"/>
+                </a:solidFill>
+              </a:defRPr>
+            </a:pPr>
+            <a:r>
+              <a:t>4. Click 'View Report' on candidate to open historical performance modal</a:t>
+            </a:r>
+          </a:p>
+          <a:p>
+            <a:pPr>
+              <a:spcBef>
+                <a:spcPts val="500"/>
+              </a:spcBef>
+              <a:defRPr sz="950">
+                <a:solidFill>
+                  <a:srgbClr val="FFFFFF"/>
+                </a:solidFill>
+              </a:defRPr>
+            </a:pPr>
+            <a:r>
+              <a:t>5. Click 'Export Roster CSV' &amp; 'Export Submissions CSV' for audit reports</a:t>
+            </a:r>
+          </a:p>
+        </p:txBody>
+      </p:sp>
+    </p:spTree>
+  </p:cSld>
+  <p:clrMapOvr>
+    <a:masterClrMapping/>
+  </p:clrMapOvr>
+</p:sld>
+</file>
+
+<file path=ppt/slides/slide14.xml><?xml version="1.0" encoding="utf-8"?>
+<p:sld xmlns:a="http://schemas.openxmlformats.org/drawingml/2006/main" xmlns:p="http://schemas.openxmlformats.org/presentationml/2006/main" xmlns:r="http://schemas.openxmlformats.org/officeDocument/2006/relationships">
+  <p:cSld>
+    <p:spTree>
+      <p:nvGrpSpPr>
+        <p:cNvPr id="1" name=""/>
+        <p:cNvGrpSpPr/>
+        <p:nvPr/>
+      </p:nvGrpSpPr>
+      <p:grpSpPr/>
+      <p:sp>
+        <p:nvSpPr>
+          <p:cNvPr id="2" name="Rectangle 1"/>
+          <p:cNvSpPr/>
+          <p:nvPr/>
+        </p:nvSpPr>
+        <p:spPr>
+          <a:xfrm>
+            <a:off x="0" y="0"/>
+            <a:ext cx="12191695" cy="6858000"/>
+          </a:xfrm>
+          <a:prstGeom prst="rect">
+            <a:avLst/>
+          </a:prstGeom>
+          <a:solidFill>
+            <a:srgbClr val="0F172A"/>
+          </a:solidFill>
+          <a:ln>
+            <a:noFill/>
+          </a:ln>
+        </p:spPr>
+        <p:style>
+          <a:lnRef idx="1">
+            <a:schemeClr val="accent1"/>
+          </a:lnRef>
+          <a:fillRef idx="3">
+            <a:schemeClr val="accent1"/>
+          </a:fillRef>
+          <a:effectRef idx="2">
+            <a:schemeClr val="accent1"/>
+          </a:effectRef>
+          <a:fontRef idx="minor">
+            <a:schemeClr val="lt1"/>
+          </a:fontRef>
+        </p:style>
+        <p:txBody>
+          <a:bodyPr rtlCol="0" anchor="ctr"/>
+          <a:lstStyle/>
+          <a:p>
+            <a:pPr algn="ctr"/>
+          </a:p>
+        </p:txBody>
+      </p:sp>
+      <p:sp>
+        <p:nvSpPr>
+          <p:cNvPr id="3" name="TextBox 2"/>
+          <p:cNvSpPr txBox="1"/>
+          <p:nvPr/>
+        </p:nvSpPr>
+        <p:spPr>
+          <a:xfrm>
+            <a:off x="731520" y="365760"/>
+            <a:ext cx="10698480" cy="365760"/>
+          </a:xfrm>
+          <a:prstGeom prst="rect">
+            <a:avLst/>
+          </a:prstGeom>
+          <a:noFill/>
+        </p:spPr>
+        <p:txBody>
+          <a:bodyPr wrap="square">
+            <a:spAutoFit/>
+          </a:bodyPr>
+          <a:lstStyle/>
+          <a:p>
+            <a:pPr>
+              <a:defRPr sz="1100" b="1">
+                <a:solidFill>
+                  <a:srgbClr val="3B82F6"/>
+                </a:solidFill>
+              </a:defRPr>
+            </a:pPr>
+            <a:r>
+              <a:t>REVIEW 1 — SETUP &amp; SRS</a:t>
+            </a:r>
+          </a:p>
+        </p:txBody>
+      </p:sp>
+      <p:sp>
+        <p:nvSpPr>
+          <p:cNvPr id="4" name="TextBox 3"/>
+          <p:cNvSpPr txBox="1"/>
+          <p:nvPr/>
+        </p:nvSpPr>
+        <p:spPr>
+          <a:xfrm>
+            <a:off x="731520" y="640080"/>
+            <a:ext cx="10698480" cy="731520"/>
+          </a:xfrm>
+          <a:prstGeom prst="rect">
+            <a:avLst/>
+          </a:prstGeom>
+          <a:noFill/>
+        </p:spPr>
+        <p:txBody>
+          <a:bodyPr wrap="square">
+            <a:spAutoFit/>
+          </a:bodyPr>
+          <a:lstStyle/>
+          <a:p>
+            <a:pPr>
+              <a:defRPr sz="2400" b="1">
+                <a:solidFill>
+                  <a:srgbClr val="FFFFFF"/>
+                </a:solidFill>
+              </a:defRPr>
+            </a:pPr>
+            <a:r>
               <a:t>Review 1 Deliverables Summary &amp; Next Steps</a:t>
             </a:r>
           </a:p>
@@ -7472,7 +9797,7 @@
               </a:defRPr>
             </a:pPr>
             <a:r>
-              <a:t>Modular Folder Architecture &amp; Technology Stack</a:t>
+              <a:t>Software Requirements Specification (SRS) — Architecture &amp; Scope</a:t>
             </a:r>
           </a:p>
         </p:txBody>
@@ -7486,7 +9811,7 @@
         <p:spPr>
           <a:xfrm>
             <a:off x="731520" y="1645920"/>
-            <a:ext cx="5212080" cy="2148840"/>
+            <a:ext cx="3474720" cy="4480560"/>
           </a:xfrm>
           <a:prstGeom prst="roundRect">
             <a:avLst/>
@@ -7531,7 +9856,7 @@
         <p:spPr>
           <a:xfrm>
             <a:off x="731520" y="1645920"/>
-            <a:ext cx="5212080" cy="73152"/>
+            <a:ext cx="3474720" cy="73152"/>
           </a:xfrm>
           <a:prstGeom prst="rect">
             <a:avLst/>
@@ -7573,8 +9898,8 @@
         </p:nvSpPr>
         <p:spPr>
           <a:xfrm>
-            <a:off x="914400" y="1783080"/>
-            <a:ext cx="4846320" cy="1828800"/>
+            <a:off x="914400" y="1828800"/>
+            <a:ext cx="3108960" cy="4114800"/>
           </a:xfrm>
           <a:prstGeom prst="rect">
             <a:avLst/>
@@ -7588,104 +9913,77 @@
           <a:lstStyle/>
           <a:p>
             <a:pPr>
-              <a:defRPr sz="1100" b="1">
+              <a:spcAft>
+                <a:spcPts val="1000"/>
+              </a:spcAft>
+              <a:defRPr sz="1200" b="1">
                 <a:solidFill>
                   <a:srgbClr val="3B82F6"/>
                 </a:solidFill>
               </a:defRPr>
             </a:pPr>
             <a:r>
-              <a:t>BACKEND CORE</a:t>
-            </a:r>
-          </a:p>
-          <a:p>
-            <a:pPr>
-              <a:spcAft>
-                <a:spcPts val="400"/>
-              </a:spcAft>
-              <a:defRPr sz="1000" b="1">
+              <a:t>IEEE 830 STANDARD STRUCTURE</a:t>
+            </a:r>
+          </a:p>
+          <a:p>
+            <a:pPr>
+              <a:spcBef>
+                <a:spcPts val="600"/>
+              </a:spcBef>
+              <a:defRPr sz="1000">
                 <a:solidFill>
                   <a:srgbClr val="FFFFFF"/>
                 </a:solidFill>
               </a:defRPr>
             </a:pPr>
             <a:r>
-              <a:t>Stack: FastAPI + Uvicorn + SQLite</a:t>
+              <a:t>• Formal specification covering Functional &amp; Non-Functional criteria</a:t>
             </a:r>
           </a:p>
           <a:p>
             <a:pPr>
               <a:spcBef>
-                <a:spcPts val="100"/>
+                <a:spcPts val="600"/>
               </a:spcBef>
-              <a:defRPr sz="900">
-                <a:solidFill>
-                  <a:srgbClr val="CBD5E1"/>
-                </a:solidFill>
-              </a:defRPr>
-            </a:pPr>
-            <a:r>
-              <a:t>▪ server.py: Unified REST API and WebSocket connection manager</a:t>
+              <a:defRPr sz="1000">
+                <a:solidFill>
+                  <a:srgbClr val="FFFFFF"/>
+                </a:solidFill>
+              </a:defRPr>
+            </a:pPr>
+            <a:r>
+              <a:t>• Document: docs/SRS_Document.md (Version 1.0.0)</a:t>
             </a:r>
           </a:p>
           <a:p>
             <a:pPr>
               <a:spcBef>
-                <a:spcPts val="100"/>
+                <a:spcPts val="600"/>
               </a:spcBef>
-              <a:defRPr sz="900">
-                <a:solidFill>
-                  <a:srgbClr val="CBD5E1"/>
-                </a:solidFill>
-              </a:defRPr>
-            </a:pPr>
-            <a:r>
-              <a:t>▪ backend/api/v1/: Enterprise modular routers (auth, quizzes, attempts, admin)</a:t>
+              <a:defRPr sz="1000">
+                <a:solidFill>
+                  <a:srgbClr val="FFFFFF"/>
+                </a:solidFill>
+              </a:defRPr>
+            </a:pPr>
+            <a:r>
+              <a:t>• Multi-tenant data isolation and audit trails</a:t>
             </a:r>
           </a:p>
           <a:p>
             <a:pPr>
               <a:spcBef>
-                <a:spcPts val="100"/>
+                <a:spcPts val="600"/>
               </a:spcBef>
-              <a:defRPr sz="900">
-                <a:solidFill>
-                  <a:srgbClr val="CBD5E1"/>
-                </a:solidFill>
-              </a:defRPr>
-            </a:pPr>
-            <a:r>
-              <a:t>▪ backend/core/: Database session factory, security JWT, telemetry middleware</a:t>
-            </a:r>
-          </a:p>
-          <a:p>
-            <a:pPr>
-              <a:spcBef>
-                <a:spcPts val="100"/>
-              </a:spcBef>
-              <a:defRPr sz="900">
-                <a:solidFill>
-                  <a:srgbClr val="CBD5E1"/>
-                </a:solidFill>
-              </a:defRPr>
-            </a:pPr>
-            <a:r>
-              <a:t>▪ backend/models/: Declarative multi-tenant SQLAlchemy domain models</a:t>
-            </a:r>
-          </a:p>
-          <a:p>
-            <a:pPr>
-              <a:spcBef>
-                <a:spcPts val="100"/>
-              </a:spcBef>
-              <a:defRPr sz="900">
-                <a:solidFill>
-                  <a:srgbClr val="CBD5E1"/>
-                </a:solidFill>
-              </a:defRPr>
-            </a:pPr>
-            <a:r>
-              <a:t>▪ ai_quiz_generator.py: Curriculum MCQ generation engine</a:t>
+              <a:defRPr sz="1000">
+                <a:solidFill>
+                  <a:srgbClr val="FFFFFF"/>
+                </a:solidFill>
+              </a:defRPr>
+            </a:pPr>
+            <a:r>
+              <a:t>• Integration with TQM Q20 (Overall Software Quality mandate)</a:t>
             </a:r>
           </a:p>
         </p:txBody>
@@ -7698,8 +9996,8 @@
         </p:nvSpPr>
         <p:spPr>
           <a:xfrm>
-            <a:off x="6172200" y="1645920"/>
-            <a:ext cx="5212080" cy="2148840"/>
+            <a:off x="4343400" y="1645920"/>
+            <a:ext cx="3474720" cy="4480560"/>
           </a:xfrm>
           <a:prstGeom prst="roundRect">
             <a:avLst/>
@@ -7743,8 +10041,8 @@
         </p:nvSpPr>
         <p:spPr>
           <a:xfrm>
-            <a:off x="6172200" y="1645920"/>
-            <a:ext cx="5212080" cy="73152"/>
+            <a:off x="4343400" y="1645920"/>
+            <a:ext cx="3474720" cy="73152"/>
           </a:xfrm>
           <a:prstGeom prst="rect">
             <a:avLst/>
@@ -7786,8 +10084,8 @@
         </p:nvSpPr>
         <p:spPr>
           <a:xfrm>
-            <a:off x="6355080" y="1783080"/>
-            <a:ext cx="4846320" cy="1828800"/>
+            <a:off x="4526280" y="1828800"/>
+            <a:ext cx="3108960" cy="4114800"/>
           </a:xfrm>
           <a:prstGeom prst="rect">
             <a:avLst/>
@@ -7801,104 +10099,77 @@
           <a:lstStyle/>
           <a:p>
             <a:pPr>
-              <a:defRPr sz="1100" b="1">
+              <a:spcAft>
+                <a:spcPts val="1000"/>
+              </a:spcAft>
+              <a:defRPr sz="1200" b="1">
                 <a:solidFill>
                   <a:srgbClr val="10B981"/>
                 </a:solidFill>
               </a:defRPr>
             </a:pPr>
             <a:r>
-              <a:t>DESKTOP APPLICATION</a:t>
-            </a:r>
-          </a:p>
-          <a:p>
-            <a:pPr>
-              <a:spcAft>
-                <a:spcPts val="400"/>
-              </a:spcAft>
-              <a:defRPr sz="1000" b="1">
+              <a:t>SYSTEM BOUNDARIES &amp; ACTORS</a:t>
+            </a:r>
+          </a:p>
+          <a:p>
+            <a:pPr>
+              <a:spcBef>
+                <a:spcPts val="600"/>
+              </a:spcBef>
+              <a:defRPr sz="1000">
                 <a:solidFill>
                   <a:srgbClr val="FFFFFF"/>
                 </a:solidFill>
               </a:defRPr>
             </a:pPr>
             <a:r>
-              <a:t>Stack: CustomTkinter GUI Engine</a:t>
+              <a:t>• Primary Actors: Students (Examinees), Faculty (Examiners), Admins</a:t>
             </a:r>
           </a:p>
           <a:p>
             <a:pPr>
               <a:spcBef>
-                <a:spcPts val="100"/>
+                <a:spcPts val="600"/>
               </a:spcBef>
-              <a:defRPr sz="900">
-                <a:solidFill>
-                  <a:srgbClr val="CBD5E1"/>
-                </a:solidFill>
-              </a:defRPr>
-            </a:pPr>
-            <a:r>
-              <a:t>▪ desktop_app.py: Standalone native Windows client</a:t>
+              <a:defRPr sz="1000">
+                <a:solidFill>
+                  <a:srgbClr val="FFFFFF"/>
+                </a:solidFill>
+              </a:defRPr>
+            </a:pPr>
+            <a:r>
+              <a:t>• Client Channels: Web Browser (HTML5/CSS3) &amp; Windows Desktop GUI</a:t>
             </a:r>
           </a:p>
           <a:p>
             <a:pPr>
               <a:spcBef>
-                <a:spcPts val="100"/>
+                <a:spcPts val="600"/>
               </a:spcBef>
-              <a:defRPr sz="900">
-                <a:solidFill>
-                  <a:srgbClr val="CBD5E1"/>
-                </a:solidFill>
-              </a:defRPr>
-            </a:pPr>
-            <a:r>
-              <a:t>▪ DatabaseManager: Direct transactional SQLite integration</a:t>
+              <a:defRPr sz="1000">
+                <a:solidFill>
+                  <a:srgbClr val="FFFFFF"/>
+                </a:solidFill>
+              </a:defRPr>
+            </a:pPr>
+            <a:r>
+              <a:t>• Communication: High-throughput JSON REST APIs + WebSockets</a:t>
             </a:r>
           </a:p>
           <a:p>
             <a:pPr>
               <a:spcBef>
-                <a:spcPts val="100"/>
+                <a:spcPts val="600"/>
               </a:spcBef>
-              <a:defRPr sz="900">
-                <a:solidFill>
-                  <a:srgbClr val="CBD5E1"/>
-                </a:solidFill>
-              </a:defRPr>
-            </a:pPr>
-            <a:r>
-              <a:t>▪ Strict Grid Alignment: Pixel-perfect 44px table rows and KPI cards</a:t>
-            </a:r>
-          </a:p>
-          <a:p>
-            <a:pPr>
-              <a:spcBef>
-                <a:spcPts val="100"/>
-              </a:spcBef>
-              <a:defRPr sz="900">
-                <a:solidFill>
-                  <a:srgbClr val="CBD5E1"/>
-                </a:solidFill>
-              </a:defRPr>
-            </a:pPr>
-            <a:r>
-              <a:t>▪ Theme Engine: Cream Modern Theme + High-Contrast Dark Mode</a:t>
-            </a:r>
-          </a:p>
-          <a:p>
-            <a:pPr>
-              <a:spcBef>
-                <a:spcPts val="100"/>
-              </a:spcBef>
-              <a:defRPr sz="900">
-                <a:solidFill>
-                  <a:srgbClr val="CBD5E1"/>
-                </a:solidFill>
-              </a:defRPr>
-            </a:pPr>
-            <a:r>
-              <a:t>▪ Accessibility: Dynamic font scaling (A+/A-) and focus modes</a:t>
+              <a:defRPr sz="1000">
+                <a:solidFill>
+                  <a:srgbClr val="FFFFFF"/>
+                </a:solidFill>
+              </a:defRPr>
+            </a:pPr>
+            <a:r>
+              <a:t>• Storage Engine: Transactional ACID-compliant SQLite instance</a:t>
             </a:r>
           </a:p>
         </p:txBody>
@@ -7911,8 +10182,8 @@
         </p:nvSpPr>
         <p:spPr>
           <a:xfrm>
-            <a:off x="731520" y="3977639"/>
-            <a:ext cx="5212080" cy="2148840"/>
+            <a:off x="7955280" y="1645920"/>
+            <a:ext cx="3474720" cy="4480560"/>
           </a:xfrm>
           <a:prstGeom prst="roundRect">
             <a:avLst/>
@@ -7956,8 +10227,8 @@
         </p:nvSpPr>
         <p:spPr>
           <a:xfrm>
-            <a:off x="731520" y="3977639"/>
-            <a:ext cx="5212080" cy="73152"/>
+            <a:off x="7955280" y="1645920"/>
+            <a:ext cx="3474720" cy="73152"/>
           </a:xfrm>
           <a:prstGeom prst="rect">
             <a:avLst/>
@@ -7999,8 +10270,8 @@
         </p:nvSpPr>
         <p:spPr>
           <a:xfrm>
-            <a:off x="914400" y="4114799"/>
-            <a:ext cx="4846320" cy="1828800"/>
+            <a:off x="8138160" y="1828800"/>
+            <a:ext cx="3108960" cy="4114800"/>
           </a:xfrm>
           <a:prstGeom prst="rect">
             <a:avLst/>
@@ -8014,302 +10285,77 @@
           <a:lstStyle/>
           <a:p>
             <a:pPr>
-              <a:defRPr sz="1100" b="1">
+              <a:spcAft>
+                <a:spcPts val="1000"/>
+              </a:spcAft>
+              <a:defRPr sz="1200" b="1">
                 <a:solidFill>
                   <a:srgbClr val="F59E0B"/>
                 </a:solidFill>
               </a:defRPr>
             </a:pPr>
             <a:r>
-              <a:t>WEB APPLICATION</a:t>
-            </a:r>
-          </a:p>
-          <a:p>
-            <a:pPr>
-              <a:spcAft>
-                <a:spcPts val="400"/>
-              </a:spcAft>
-              <a:defRPr sz="1000" b="1">
+              <a:t>POKA-YOKE MISTAKE PROOFING</a:t>
+            </a:r>
+          </a:p>
+          <a:p>
+            <a:pPr>
+              <a:spcBef>
+                <a:spcPts val="600"/>
+              </a:spcBef>
+              <a:defRPr sz="1000">
                 <a:solidFill>
                   <a:srgbClr val="FFFFFF"/>
                 </a:solidFill>
               </a:defRPr>
             </a:pPr>
             <a:r>
-              <a:t>Stack: HTML5 + Vanilla CSS + JS</a:t>
+              <a:t>• Validation Layer: Eliminates malformed question inputs and bad boundaries</a:t>
             </a:r>
           </a:p>
           <a:p>
             <a:pPr>
               <a:spcBef>
-                <a:spcPts val="100"/>
+                <a:spcPts val="600"/>
               </a:spcBef>
-              <a:defRPr sz="900">
-                <a:solidFill>
-                  <a:srgbClr val="CBD5E1"/>
-                </a:solidFill>
-              </a:defRPr>
-            </a:pPr>
-            <a:r>
-              <a:t>▪ index.html: High-performance single page assessment portal</a:t>
+              <a:defRPr sz="1000">
+                <a:solidFill>
+                  <a:srgbClr val="FFFFFF"/>
+                </a:solidFill>
+              </a:defRPr>
+            </a:pPr>
+            <a:r>
+              <a:t>• Schema Guards: Pydantic v2 strict models for all request bodies</a:t>
             </a:r>
           </a:p>
           <a:p>
             <a:pPr>
               <a:spcBef>
-                <a:spcPts val="100"/>
+                <a:spcPts val="600"/>
               </a:spcBef>
-              <a:defRPr sz="900">
-                <a:solidFill>
-                  <a:srgbClr val="CBD5E1"/>
-                </a:solidFill>
-              </a:defRPr>
-            </a:pPr>
-            <a:r>
-              <a:t>▪ assets/css/: Modular design tokens (variables, quiz-engine, admin, examiner)</a:t>
+              <a:defRPr sz="1000">
+                <a:solidFill>
+                  <a:srgbClr val="FFFFFF"/>
+                </a:solidFill>
+              </a:defRPr>
+            </a:pPr>
+            <a:r>
+              <a:t>• Join Code Integrity: Unique constraint locks preventing collisions</a:t>
             </a:r>
           </a:p>
           <a:p>
             <a:pPr>
               <a:spcBef>
-                <a:spcPts val="100"/>
+                <a:spcPts val="600"/>
               </a:spcBef>
-              <a:defRPr sz="900">
-                <a:solidFill>
-                  <a:srgbClr val="CBD5E1"/>
-                </a:solidFill>
-              </a:defRPr>
-            </a:pPr>
-            <a:r>
-              <a:t>▪ assets/js/: Segregated controllers (auth.js, app.js, quiz-engine.js, admin.js)</a:t>
-            </a:r>
-          </a:p>
-          <a:p>
-            <a:pPr>
-              <a:spcBef>
-                <a:spcPts val="100"/>
-              </a:spcBef>
-              <a:defRPr sz="900">
-                <a:solidFill>
-                  <a:srgbClr val="CBD5E1"/>
-                </a:solidFill>
-              </a:defRPr>
-            </a:pPr>
-            <a:r>
-              <a:t>▪ sw.js &amp; manifest.json: Mobile progressive web app enablement</a:t>
-            </a:r>
-          </a:p>
-        </p:txBody>
-      </p:sp>
-      <p:sp>
-        <p:nvSpPr>
-          <p:cNvPr id="14" name="Rounded Rectangle 13"/>
-          <p:cNvSpPr/>
-          <p:nvPr/>
-        </p:nvSpPr>
-        <p:spPr>
-          <a:xfrm>
-            <a:off x="6172200" y="3977639"/>
-            <a:ext cx="5212080" cy="2148840"/>
-          </a:xfrm>
-          <a:prstGeom prst="roundRect">
-            <a:avLst/>
-          </a:prstGeom>
-          <a:solidFill>
-            <a:srgbClr val="1E293B"/>
-          </a:solidFill>
-          <a:ln w="12700">
-            <a:solidFill>
-              <a:srgbClr val="334155"/>
-            </a:solidFill>
-          </a:ln>
-        </p:spPr>
-        <p:style>
-          <a:lnRef idx="1">
-            <a:schemeClr val="accent1"/>
-          </a:lnRef>
-          <a:fillRef idx="3">
-            <a:schemeClr val="accent1"/>
-          </a:fillRef>
-          <a:effectRef idx="2">
-            <a:schemeClr val="accent1"/>
-          </a:effectRef>
-          <a:fontRef idx="minor">
-            <a:schemeClr val="lt1"/>
-          </a:fontRef>
-        </p:style>
-        <p:txBody>
-          <a:bodyPr rtlCol="0" anchor="ctr"/>
-          <a:lstStyle/>
-          <a:p>
-            <a:pPr algn="ctr"/>
-          </a:p>
-        </p:txBody>
-      </p:sp>
-      <p:sp>
-        <p:nvSpPr>
-          <p:cNvPr id="15" name="Rectangle 14"/>
-          <p:cNvSpPr/>
-          <p:nvPr/>
-        </p:nvSpPr>
-        <p:spPr>
-          <a:xfrm>
-            <a:off x="6172200" y="3977639"/>
-            <a:ext cx="5212080" cy="73152"/>
-          </a:xfrm>
-          <a:prstGeom prst="rect">
-            <a:avLst/>
-          </a:prstGeom>
-          <a:solidFill>
-            <a:srgbClr val="8B5CF6"/>
-          </a:solidFill>
-          <a:ln>
-            <a:noFill/>
-          </a:ln>
-        </p:spPr>
-        <p:style>
-          <a:lnRef idx="1">
-            <a:schemeClr val="accent1"/>
-          </a:lnRef>
-          <a:fillRef idx="3">
-            <a:schemeClr val="accent1"/>
-          </a:fillRef>
-          <a:effectRef idx="2">
-            <a:schemeClr val="accent1"/>
-          </a:effectRef>
-          <a:fontRef idx="minor">
-            <a:schemeClr val="lt1"/>
-          </a:fontRef>
-        </p:style>
-        <p:txBody>
-          <a:bodyPr rtlCol="0" anchor="ctr"/>
-          <a:lstStyle/>
-          <a:p>
-            <a:pPr algn="ctr"/>
-          </a:p>
-        </p:txBody>
-      </p:sp>
-      <p:sp>
-        <p:nvSpPr>
-          <p:cNvPr id="16" name="TextBox 15"/>
-          <p:cNvSpPr txBox="1"/>
-          <p:nvPr/>
-        </p:nvSpPr>
-        <p:spPr>
-          <a:xfrm>
-            <a:off x="6355080" y="4114799"/>
-            <a:ext cx="4846320" cy="1828800"/>
-          </a:xfrm>
-          <a:prstGeom prst="rect">
-            <a:avLst/>
-          </a:prstGeom>
-          <a:noFill/>
-        </p:spPr>
-        <p:txBody>
-          <a:bodyPr wrap="square">
-            <a:spAutoFit/>
-          </a:bodyPr>
-          <a:lstStyle/>
-          <a:p>
-            <a:pPr>
-              <a:defRPr sz="1100" b="1">
-                <a:solidFill>
-                  <a:srgbClr val="8B5CF6"/>
-                </a:solidFill>
-              </a:defRPr>
-            </a:pPr>
-            <a:r>
-              <a:t>QUALITY &amp; TEST HARNESS</a:t>
-            </a:r>
-          </a:p>
-          <a:p>
-            <a:pPr>
-              <a:spcAft>
-                <a:spcPts val="400"/>
-              </a:spcAft>
-              <a:defRPr sz="1000" b="1">
+              <a:defRPr sz="1000">
                 <a:solidFill>
                   <a:srgbClr val="FFFFFF"/>
                 </a:solidFill>
               </a:defRPr>
             </a:pPr>
             <a:r>
-              <a:t>Stack: Pytest Automated Suite</a:t>
-            </a:r>
-          </a:p>
-          <a:p>
-            <a:pPr>
-              <a:spcBef>
-                <a:spcPts val="100"/>
-              </a:spcBef>
-              <a:defRPr sz="900">
-                <a:solidFill>
-                  <a:srgbClr val="CBD5E1"/>
-                </a:solidFill>
-              </a:defRPr>
-            </a:pPr>
-            <a:r>
-              <a:t>▪ tests/test_web_auth.py: Web API contract verification</a:t>
-            </a:r>
-          </a:p>
-          <a:p>
-            <a:pPr>
-              <a:spcBef>
-                <a:spcPts val="100"/>
-              </a:spcBef>
-              <a:defRPr sz="900">
-                <a:solidFill>
-                  <a:srgbClr val="CBD5E1"/>
-                </a:solidFill>
-              </a:defRPr>
-            </a:pPr>
-            <a:r>
-              <a:t>▪ tests/test_desktop_auth.py: Desktop authentication &amp; RBAC tabs</a:t>
-            </a:r>
-          </a:p>
-          <a:p>
-            <a:pPr>
-              <a:spcBef>
-                <a:spcPts val="100"/>
-              </a:spcBef>
-              <a:defRPr sz="900">
-                <a:solidFill>
-                  <a:srgbClr val="CBD5E1"/>
-                </a:solidFill>
-              </a:defRPr>
-            </a:pPr>
-            <a:r>
-              <a:t>▪ tests/test_admin_panel.py: Admin telemetry and user report verification</a:t>
-            </a:r>
-          </a:p>
-          <a:p>
-            <a:pPr>
-              <a:spcBef>
-                <a:spcPts val="100"/>
-              </a:spcBef>
-              <a:defRPr sz="900">
-                <a:solidFill>
-                  <a:srgbClr val="CBD5E1"/>
-                </a:solidFill>
-              </a:defRPr>
-            </a:pPr>
-            <a:r>
-              <a:t>▪ tests/test_join_code_workflow.py: End-to-end quiz code workflow</a:t>
-            </a:r>
-          </a:p>
-          <a:p>
-            <a:pPr>
-              <a:spcBef>
-                <a:spcPts val="100"/>
-              </a:spcBef>
-              <a:defRPr sz="900">
-                <a:solidFill>
-                  <a:srgbClr val="CBD5E1"/>
-                </a:solidFill>
-              </a:defRPr>
-            </a:pPr>
-            <a:r>
-              <a:t>▪ 22 / 22 Tests Passing with 0 errors</a:t>
+              <a:t>• Deterministic State: In-memory evaluation removing race conditions</a:t>
             </a:r>
           </a:p>
         </p:txBody>
@@ -8440,7 +10486,7 @@
               </a:defRPr>
             </a:pPr>
             <a:r>
-              <a:t>Core Modules &amp; Feature Breakdown</a:t>
+              <a:t>SRS: Functional Requirements Matrix (FR-1 to FR-5)</a:t>
             </a:r>
           </a:p>
         </p:txBody>
@@ -8541,8 +10587,8 @@
         </p:nvSpPr>
         <p:spPr>
           <a:xfrm>
-            <a:off x="914400" y="1828800"/>
-            <a:ext cx="3108960" cy="1783080"/>
+            <a:off x="914400" y="1783080"/>
+            <a:ext cx="3108960" cy="1828800"/>
           </a:xfrm>
           <a:prstGeom prst="rect">
             <a:avLst/>
@@ -8566,19 +10612,19 @@
               </a:defRPr>
             </a:pPr>
             <a:r>
-              <a:t>M1: Identity &amp; Authentication</a:t>
-            </a:r>
-          </a:p>
-          <a:p>
-            <a:pPr>
-              <a:defRPr sz="1000">
+              <a:t>FR-1: Multi-Role Dashboards</a:t>
+            </a:r>
+          </a:p>
+          <a:p>
+            <a:pPr>
+              <a:defRPr sz="950">
                 <a:solidFill>
                   <a:srgbClr val="CBD5E1"/>
                 </a:solidFill>
               </a:defRPr>
             </a:pPr>
             <a:r>
-              <a:t>Role-based sign-in and registration for Student, Faculty, and Admin. Dynamically alters client navigation tabs according to authenticated persona.</a:t>
+              <a:t>Segregated workspaces for Student, Faculty, and Admin with dynamic navigation visibility based on authenticated role.</a:t>
             </a:r>
           </a:p>
         </p:txBody>
@@ -8679,8 +10725,8 @@
         </p:nvSpPr>
         <p:spPr>
           <a:xfrm>
-            <a:off x="4526280" y="1828800"/>
-            <a:ext cx="3108960" cy="1783080"/>
+            <a:off x="4526280" y="1783080"/>
+            <a:ext cx="3108960" cy="1828800"/>
           </a:xfrm>
           <a:prstGeom prst="rect">
             <a:avLst/>
@@ -8704,19 +10750,19 @@
               </a:defRPr>
             </a:pPr>
             <a:r>
-              <a:t>M2: Examiner Studio &amp; AI Wizard</a:t>
-            </a:r>
-          </a:p>
-          <a:p>
-            <a:pPr>
-              <a:defRPr sz="1000">
+              <a:t>FR-2: Poka-Yoke Input Validation</a:t>
+            </a:r>
+          </a:p>
+          <a:p>
+            <a:pPr>
+              <a:defRPr sz="950">
                 <a:solidFill>
                   <a:srgbClr val="CBD5E1"/>
                 </a:solidFill>
               </a:defRPr>
             </a:pPr>
             <a:r>
-              <a:t>Faculty test creator supporting manual MCQ authoring or AI syllabus synthesis. Configures duration, passing score, category, and deterministic 6-character Join Code.</a:t>
+              <a:t>Strict bounds checking on quiz limits (1-180m, 1-100%), non-empty options, and unique constraint enforcement on Join Codes.</a:t>
             </a:r>
           </a:p>
         </p:txBody>
@@ -8817,8 +10863,8 @@
         </p:nvSpPr>
         <p:spPr>
           <a:xfrm>
-            <a:off x="8138160" y="1828800"/>
-            <a:ext cx="3108960" cy="1783080"/>
+            <a:off x="8138160" y="1783080"/>
+            <a:ext cx="3108960" cy="1828800"/>
           </a:xfrm>
           <a:prstGeom prst="rect">
             <a:avLst/>
@@ -8842,19 +10888,19 @@
               </a:defRPr>
             </a:pPr>
             <a:r>
-              <a:t>M3: Candidate Assessment Arena</a:t>
-            </a:r>
-          </a:p>
-          <a:p>
-            <a:pPr>
-              <a:defRPr sz="1000">
+              <a:t>FR-3: AI Question Synthesis</a:t>
+            </a:r>
+          </a:p>
+          <a:p>
+            <a:pPr>
+              <a:defRPr sz="950">
                 <a:solidFill>
                   <a:srgbClr val="CBD5E1"/>
                 </a:solidFill>
               </a:defRPr>
             </a:pPr>
             <a:r>
-              <a:t>Quick test join via code. Delivers questions with interactive palette, authoritative server countdown timer, and automatic submission upon deadline expiry.</a:t>
+              <a:t>Automated MCQ synthesis based on syllabus topic and difficulty (Beginner, Medium, Advanced) with deterministic answer keys.</a:t>
             </a:r>
           </a:p>
         </p:txBody>
@@ -8919,7 +10965,7 @@
             <a:avLst/>
           </a:prstGeom>
           <a:solidFill>
-            <a:srgbClr val="EF4444"/>
+            <a:srgbClr val="8B5CF6"/>
           </a:solidFill>
           <a:ln>
             <a:noFill/>
@@ -8955,8 +11001,8 @@
         </p:nvSpPr>
         <p:spPr>
           <a:xfrm>
-            <a:off x="914400" y="4160519"/>
-            <a:ext cx="3108960" cy="1783080"/>
+            <a:off x="914400" y="4114799"/>
+            <a:ext cx="3108960" cy="1828800"/>
           </a:xfrm>
           <a:prstGeom prst="rect">
             <a:avLst/>
@@ -8975,24 +11021,24 @@
               </a:spcAft>
               <a:defRPr sz="1100" b="1">
                 <a:solidFill>
-                  <a:srgbClr val="EF4444"/>
-                </a:solidFill>
-              </a:defRPr>
-            </a:pPr>
-            <a:r>
-              <a:t>M4: Anti-Cheat Proctoring Hub</a:t>
-            </a:r>
-          </a:p>
-          <a:p>
-            <a:pPr>
-              <a:defRPr sz="1000">
+                  <a:srgbClr val="8B5CF6"/>
+                </a:solidFill>
+              </a:defRPr>
+            </a:pPr>
+            <a:r>
+              <a:t>FR-4: Automated Gradebook &amp; Export</a:t>
+            </a:r>
+          </a:p>
+          <a:p>
+            <a:pPr>
+              <a:defRPr sz="950">
                 <a:solidFill>
                   <a:srgbClr val="CBD5E1"/>
                 </a:solidFill>
               </a:defRPr>
             </a:pPr>
             <a:r>
-              <a:t>Active focus tracking monitors window blur and tab switching during exams. Violations increment in real time and are permanently audited into submission records.</a:t>
+              <a:t>Instant candidate scorecard delivery with per-question review and one-click streaming CSV exports for rosters and attempts.</a:t>
             </a:r>
           </a:p>
         </p:txBody>
@@ -9057,7 +11103,7 @@
             <a:avLst/>
           </a:prstGeom>
           <a:solidFill>
-            <a:srgbClr val="8B5CF6"/>
+            <a:srgbClr val="0EA5E9"/>
           </a:solidFill>
           <a:ln>
             <a:noFill/>
@@ -9093,8 +11139,8 @@
         </p:nvSpPr>
         <p:spPr>
           <a:xfrm>
-            <a:off x="4526280" y="4160519"/>
-            <a:ext cx="3108960" cy="1783080"/>
+            <a:off x="4526280" y="4114799"/>
+            <a:ext cx="3108960" cy="1828800"/>
           </a:xfrm>
           <a:prstGeom prst="rect">
             <a:avLst/>
@@ -9113,162 +11159,24 @@
               </a:spcAft>
               <a:defRPr sz="1100" b="1">
                 <a:solidFill>
-                  <a:srgbClr val="8B5CF6"/>
-                </a:solidFill>
-              </a:defRPr>
-            </a:pPr>
-            <a:r>
-              <a:t>M5: Zero-Latency Auto-Grading</a:t>
-            </a:r>
-          </a:p>
-          <a:p>
-            <a:pPr>
-              <a:defRPr sz="1000">
+                  <a:srgbClr val="0EA5E9"/>
+                </a:solidFill>
+              </a:defRPr>
+            </a:pPr>
+            <a:r>
+              <a:t>FR-5: Automated Database Backups</a:t>
+            </a:r>
+          </a:p>
+          <a:p>
+            <a:pPr>
+              <a:defRPr sz="950">
                 <a:solidFill>
                   <a:srgbClr val="CBD5E1"/>
                 </a:solidFill>
               </a:defRPr>
             </a:pPr>
             <a:r>
-              <a:t>In-memory evaluation engine compares answers against key in ~25ms. Displays immediate percentage, pass/fail status, and per-question rationale explanations.</a:t>
-            </a:r>
-          </a:p>
-        </p:txBody>
-      </p:sp>
-      <p:sp>
-        <p:nvSpPr>
-          <p:cNvPr id="20" name="Rounded Rectangle 19"/>
-          <p:cNvSpPr/>
-          <p:nvPr/>
-        </p:nvSpPr>
-        <p:spPr>
-          <a:xfrm>
-            <a:off x="7955280" y="3977639"/>
-            <a:ext cx="3474720" cy="2148840"/>
-          </a:xfrm>
-          <a:prstGeom prst="roundRect">
-            <a:avLst/>
-          </a:prstGeom>
-          <a:solidFill>
-            <a:srgbClr val="1E293B"/>
-          </a:solidFill>
-          <a:ln w="12700">
-            <a:solidFill>
-              <a:srgbClr val="334155"/>
-            </a:solidFill>
-          </a:ln>
-        </p:spPr>
-        <p:style>
-          <a:lnRef idx="1">
-            <a:schemeClr val="accent1"/>
-          </a:lnRef>
-          <a:fillRef idx="3">
-            <a:schemeClr val="accent1"/>
-          </a:fillRef>
-          <a:effectRef idx="2">
-            <a:schemeClr val="accent1"/>
-          </a:effectRef>
-          <a:fontRef idx="minor">
-            <a:schemeClr val="lt1"/>
-          </a:fontRef>
-        </p:style>
-        <p:txBody>
-          <a:bodyPr rtlCol="0" anchor="ctr"/>
-          <a:lstStyle/>
-          <a:p>
-            <a:pPr algn="ctr"/>
-          </a:p>
-        </p:txBody>
-      </p:sp>
-      <p:sp>
-        <p:nvSpPr>
-          <p:cNvPr id="21" name="Rectangle 20"/>
-          <p:cNvSpPr/>
-          <p:nvPr/>
-        </p:nvSpPr>
-        <p:spPr>
-          <a:xfrm>
-            <a:off x="7955280" y="3977639"/>
-            <a:ext cx="3474720" cy="73152"/>
-          </a:xfrm>
-          <a:prstGeom prst="rect">
-            <a:avLst/>
-          </a:prstGeom>
-          <a:solidFill>
-            <a:srgbClr val="0EA5E9"/>
-          </a:solidFill>
-          <a:ln>
-            <a:noFill/>
-          </a:ln>
-        </p:spPr>
-        <p:style>
-          <a:lnRef idx="1">
-            <a:schemeClr val="accent1"/>
-          </a:lnRef>
-          <a:fillRef idx="3">
-            <a:schemeClr val="accent1"/>
-          </a:fillRef>
-          <a:effectRef idx="2">
-            <a:schemeClr val="accent1"/>
-          </a:effectRef>
-          <a:fontRef idx="minor">
-            <a:schemeClr val="lt1"/>
-          </a:fontRef>
-        </p:style>
-        <p:txBody>
-          <a:bodyPr rtlCol="0" anchor="ctr"/>
-          <a:lstStyle/>
-          <a:p>
-            <a:pPr algn="ctr"/>
-          </a:p>
-        </p:txBody>
-      </p:sp>
-      <p:sp>
-        <p:nvSpPr>
-          <p:cNvPr id="22" name="TextBox 21"/>
-          <p:cNvSpPr txBox="1"/>
-          <p:nvPr/>
-        </p:nvSpPr>
-        <p:spPr>
-          <a:xfrm>
-            <a:off x="8138160" y="4160519"/>
-            <a:ext cx="3108960" cy="1783080"/>
-          </a:xfrm>
-          <a:prstGeom prst="rect">
-            <a:avLst/>
-          </a:prstGeom>
-          <a:noFill/>
-        </p:spPr>
-        <p:txBody>
-          <a:bodyPr wrap="square">
-            <a:spAutoFit/>
-          </a:bodyPr>
-          <a:lstStyle/>
-          <a:p>
-            <a:pPr>
-              <a:spcAft>
-                <a:spcPts val="600"/>
-              </a:spcAft>
-              <a:defRPr sz="1100" b="1">
-                <a:solidFill>
-                  <a:srgbClr val="0EA5E9"/>
-                </a:solidFill>
-              </a:defRPr>
-            </a:pPr>
-            <a:r>
-              <a:t>M6: Admin Governance &amp; Telemetry</a:t>
-            </a:r>
-          </a:p>
-          <a:p>
-            <a:pPr>
-              <a:defRPr sz="1000">
-                <a:solidFill>
-                  <a:srgbClr val="CBD5E1"/>
-                </a:solidFill>
-              </a:defRPr>
-            </a:pPr>
-            <a:r>
-              <a:t>Platform telemetry KPIs, filterable user roster, candidate performance scorecard drill-down modal, and instant one-click CSV export streams.</a:t>
+              <a:t>Dedicated backup utility creating timestamped SQLite snapshots in backups/ directory with on-demand snapshot triggers.</a:t>
             </a:r>
           </a:p>
         </p:txBody>
@@ -9399,7 +11307,7 @@
               </a:defRPr>
             </a:pPr>
             <a:r>
-              <a:t>Database &amp; System Design (ACID SQLite Persistence)</a:t>
+              <a:t>SRS: Non-Functional Requirements &amp; Security Safeguards</a:t>
             </a:r>
           </a:p>
         </p:txBody>
@@ -9413,7 +11321,7 @@
         <p:spPr>
           <a:xfrm>
             <a:off x="731520" y="1645920"/>
-            <a:ext cx="6217920" cy="1371600"/>
+            <a:ext cx="5212080" cy="2148840"/>
           </a:xfrm>
           <a:prstGeom prst="roundRect">
             <a:avLst/>
@@ -9458,7 +11366,7 @@
         <p:spPr>
           <a:xfrm>
             <a:off x="731520" y="1645920"/>
-            <a:ext cx="6217920" cy="73152"/>
+            <a:ext cx="5212080" cy="73152"/>
           </a:xfrm>
           <a:prstGeom prst="rect">
             <a:avLst/>
@@ -9501,7 +11409,7 @@
         <p:spPr>
           <a:xfrm>
             <a:off x="914400" y="1783080"/>
-            <a:ext cx="5852160" cy="1097280"/>
+            <a:ext cx="4846320" cy="1828800"/>
           </a:xfrm>
           <a:prstGeom prst="rect">
             <a:avLst/>
@@ -9525,19 +11433,52 @@
               </a:defRPr>
             </a:pPr>
             <a:r>
-              <a:t>TABLE: users</a:t>
-            </a:r>
-          </a:p>
-          <a:p>
-            <a:pPr>
-              <a:defRPr sz="900">
+              <a:t>SUB-250MS DETERMINISTIC SPEED</a:t>
+            </a:r>
+          </a:p>
+          <a:p>
+            <a:pPr>
+              <a:spcBef>
+                <a:spcPts val="200"/>
+              </a:spcBef>
+              <a:defRPr sz="950">
                 <a:solidFill>
                   <a:srgbClr val="FFFFFF"/>
                 </a:solidFill>
               </a:defRPr>
             </a:pPr>
             <a:r>
-              <a:t>id (PK), username (UNIQUE), password, role, full_name, department, created_at</a:t>
+              <a:t>▪ In-memory evaluation pipeline yields immediate grading without blocking I/O</a:t>
+            </a:r>
+          </a:p>
+          <a:p>
+            <a:pPr>
+              <a:spcBef>
+                <a:spcPts val="200"/>
+              </a:spcBef>
+              <a:defRPr sz="950">
+                <a:solidFill>
+                  <a:srgbClr val="FFFFFF"/>
+                </a:solidFill>
+              </a:defRPr>
+            </a:pPr>
+            <a:r>
+              <a:t>▪ Benchmark: 15 to 35 milliseconds turnaround per 50-question test</a:t>
+            </a:r>
+          </a:p>
+          <a:p>
+            <a:pPr>
+              <a:spcBef>
+                <a:spcPts val="200"/>
+              </a:spcBef>
+              <a:defRPr sz="950">
+                <a:solidFill>
+                  <a:srgbClr val="FFFFFF"/>
+                </a:solidFill>
+              </a:defRPr>
+            </a:pPr>
+            <a:r>
+              <a:t>▪ Zero client-side grading drift or race condition vulnerabilities</a:t>
             </a:r>
           </a:p>
         </p:txBody>
@@ -9550,8 +11491,8 @@
         </p:nvSpPr>
         <p:spPr>
           <a:xfrm>
-            <a:off x="731520" y="3154680"/>
-            <a:ext cx="6217920" cy="1371600"/>
+            <a:off x="6172200" y="1645920"/>
+            <a:ext cx="5212080" cy="2148840"/>
           </a:xfrm>
           <a:prstGeom prst="roundRect">
             <a:avLst/>
@@ -9595,8 +11536,8 @@
         </p:nvSpPr>
         <p:spPr>
           <a:xfrm>
-            <a:off x="731520" y="3154680"/>
-            <a:ext cx="6217920" cy="73152"/>
+            <a:off x="6172200" y="1645920"/>
+            <a:ext cx="5212080" cy="73152"/>
           </a:xfrm>
           <a:prstGeom prst="rect">
             <a:avLst/>
@@ -9638,8 +11579,8 @@
         </p:nvSpPr>
         <p:spPr>
           <a:xfrm>
-            <a:off x="914400" y="3291840"/>
-            <a:ext cx="5852160" cy="1097280"/>
+            <a:off x="6355080" y="1783080"/>
+            <a:ext cx="4846320" cy="1828800"/>
           </a:xfrm>
           <a:prstGeom prst="rect">
             <a:avLst/>
@@ -9663,19 +11604,52 @@
               </a:defRPr>
             </a:pPr>
             <a:r>
-              <a:t>TABLE: quizzes</a:t>
-            </a:r>
-          </a:p>
-          <a:p>
-            <a:pPr>
-              <a:defRPr sz="900">
+              <a:t>ACID TRANSACTION GUARANTEE</a:t>
+            </a:r>
+          </a:p>
+          <a:p>
+            <a:pPr>
+              <a:spcBef>
+                <a:spcPts val="200"/>
+              </a:spcBef>
+              <a:defRPr sz="950">
                 <a:solidFill>
                   <a:srgbClr val="FFFFFF"/>
                 </a:solidFill>
               </a:defRPr>
             </a:pPr>
             <a:r>
-              <a:t>id (PK), join_code (UNIQUE), teacher_name, title, category, duration_minutes, passing_score, tags, questions_json, created_at</a:t>
+              <a:t>▪ Atomic SQLite write transactions protect test records from corrupt state</a:t>
+            </a:r>
+          </a:p>
+          <a:p>
+            <a:pPr>
+              <a:spcBef>
+                <a:spcPts val="200"/>
+              </a:spcBef>
+              <a:defRPr sz="950">
+                <a:solidFill>
+                  <a:srgbClr val="FFFFFF"/>
+                </a:solidFill>
+              </a:defRPr>
+            </a:pPr>
+            <a:r>
+              <a:t>▪ Automatic database migrations on boot via FastAPI lifespan handlers</a:t>
+            </a:r>
+          </a:p>
+          <a:p>
+            <a:pPr>
+              <a:spcBef>
+                <a:spcPts val="200"/>
+              </a:spcBef>
+              <a:defRPr sz="950">
+                <a:solidFill>
+                  <a:srgbClr val="FFFFFF"/>
+                </a:solidFill>
+              </a:defRPr>
+            </a:pPr>
+            <a:r>
+              <a:t>▪ Zero startup deprecation warnings across all endpoints</a:t>
             </a:r>
           </a:p>
         </p:txBody>
@@ -9688,8 +11662,8 @@
         </p:nvSpPr>
         <p:spPr>
           <a:xfrm>
-            <a:off x="731520" y="4663440"/>
-            <a:ext cx="6217920" cy="1371600"/>
+            <a:off x="731520" y="3977639"/>
+            <a:ext cx="5212080" cy="2148840"/>
           </a:xfrm>
           <a:prstGeom prst="roundRect">
             <a:avLst/>
@@ -9733,14 +11707,14 @@
         </p:nvSpPr>
         <p:spPr>
           <a:xfrm>
-            <a:off x="731520" y="4663440"/>
-            <a:ext cx="6217920" cy="73152"/>
+            <a:off x="731520" y="3977639"/>
+            <a:ext cx="5212080" cy="73152"/>
           </a:xfrm>
           <a:prstGeom prst="rect">
             <a:avLst/>
           </a:prstGeom>
           <a:solidFill>
-            <a:srgbClr val="8B5CF6"/>
+            <a:srgbClr val="EF4444"/>
           </a:solidFill>
           <a:ln>
             <a:noFill/>
@@ -9776,8 +11750,8 @@
         </p:nvSpPr>
         <p:spPr>
           <a:xfrm>
-            <a:off x="914400" y="4800600"/>
-            <a:ext cx="5852160" cy="1097280"/>
+            <a:off x="914400" y="4114799"/>
+            <a:ext cx="4846320" cy="1828800"/>
           </a:xfrm>
           <a:prstGeom prst="rect">
             <a:avLst/>
@@ -9796,24 +11770,57 @@
               </a:spcAft>
               <a:defRPr sz="1100" b="1">
                 <a:solidFill>
-                  <a:srgbClr val="8B5CF6"/>
-                </a:solidFill>
-              </a:defRPr>
-            </a:pPr>
-            <a:r>
-              <a:t>TABLE: attempts</a:t>
-            </a:r>
-          </a:p>
-          <a:p>
-            <a:pPr>
-              <a:defRPr sz="900">
+                  <a:srgbClr val="EF4444"/>
+                </a:solidFill>
+              </a:defRPr>
+            </a:pPr>
+            <a:r>
+              <a:t>ACTIVE PROCTORING &amp; INTEGRITY</a:t>
+            </a:r>
+          </a:p>
+          <a:p>
+            <a:pPr>
+              <a:spcBef>
+                <a:spcPts val="200"/>
+              </a:spcBef>
+              <a:defRPr sz="950">
                 <a:solidFill>
                   <a:srgbClr val="FFFFFF"/>
                 </a:solidFill>
               </a:defRPr>
             </a:pPr>
             <a:r>
-              <a:t>id (PK), quiz_id (FK), join_code, quiz_title, teacher_name, student_name, score, total_questions, percentage, passed, cheat_violations, submitted_at</a:t>
+              <a:t>▪ Window blur &amp; tab switch listeners capture unauthorized browser browsing</a:t>
+            </a:r>
+          </a:p>
+          <a:p>
+            <a:pPr>
+              <a:spcBef>
+                <a:spcPts val="200"/>
+              </a:spcBef>
+              <a:defRPr sz="950">
+                <a:solidFill>
+                  <a:srgbClr val="FFFFFF"/>
+                </a:solidFill>
+              </a:defRPr>
+            </a:pPr>
+            <a:r>
+              <a:t>▪ Infraction tally permanently attached to candidate attempt record</a:t>
+            </a:r>
+          </a:p>
+          <a:p>
+            <a:pPr>
+              <a:spcBef>
+                <a:spcPts val="200"/>
+              </a:spcBef>
+              <a:defRPr sz="950">
+                <a:solidFill>
+                  <a:srgbClr val="FFFFFF"/>
+                </a:solidFill>
+              </a:defRPr>
+            </a:pPr>
+            <a:r>
+              <a:t>▪ Authoritative server-side countdown timer preventing client manipulation</a:t>
             </a:r>
           </a:p>
         </p:txBody>
@@ -9826,8 +11833,8 @@
         </p:nvSpPr>
         <p:spPr>
           <a:xfrm>
-            <a:off x="7132320" y="1645920"/>
-            <a:ext cx="4297680" cy="4389120"/>
+            <a:off x="6172200" y="3977639"/>
+            <a:ext cx="5212080" cy="2148840"/>
           </a:xfrm>
           <a:prstGeom prst="roundRect">
             <a:avLst/>
@@ -9871,14 +11878,14 @@
         </p:nvSpPr>
         <p:spPr>
           <a:xfrm>
-            <a:off x="7132320" y="1645920"/>
-            <a:ext cx="4297680" cy="73152"/>
+            <a:off x="6172200" y="3977639"/>
+            <a:ext cx="5212080" cy="73152"/>
           </a:xfrm>
           <a:prstGeom prst="rect">
             <a:avLst/>
           </a:prstGeom>
           <a:solidFill>
-            <a:srgbClr val="F59E0B"/>
+            <a:srgbClr val="8B5CF6"/>
           </a:solidFill>
           <a:ln>
             <a:noFill/>
@@ -9914,8 +11921,8 @@
         </p:nvSpPr>
         <p:spPr>
           <a:xfrm>
-            <a:off x="7315200" y="1828800"/>
-            <a:ext cx="3931920" cy="4023360"/>
+            <a:off x="6355080" y="4114799"/>
+            <a:ext cx="4846320" cy="1828800"/>
           </a:xfrm>
           <a:prstGeom prst="rect">
             <a:avLst/>
@@ -9930,91 +11937,61 @@
           <a:p>
             <a:pPr>
               <a:spcAft>
-                <a:spcPts val="1000"/>
+                <a:spcPts val="400"/>
               </a:spcAft>
               <a:defRPr sz="1100" b="1">
                 <a:solidFill>
-                  <a:srgbClr val="F59E0B"/>
-                </a:solidFill>
-              </a:defRPr>
-            </a:pPr>
-            <a:r>
-              <a:t>DATA INTEGRITY &amp; DESIGN HIGHLIGHTS</a:t>
+                  <a:srgbClr val="8B5CF6"/>
+                </a:solidFill>
+              </a:defRPr>
+            </a:pPr>
+            <a:r>
+              <a:t>THEMING &amp; ACCESSIBILITY</a:t>
             </a:r>
           </a:p>
           <a:p>
             <a:pPr>
               <a:spcBef>
-                <a:spcPts val="500"/>
+                <a:spcPts val="200"/>
               </a:spcBef>
               <a:defRPr sz="950">
                 <a:solidFill>
-                  <a:srgbClr val="CBD5E1"/>
-                </a:solidFill>
-              </a:defRPr>
-            </a:pPr>
-            <a:r>
-              <a:t>• ACID Transactions: All quiz updates and candidate submissions execute in atomic SQLite write transactions.</a:t>
+                  <a:srgbClr val="FFFFFF"/>
+                </a:solidFill>
+              </a:defRPr>
+            </a:pPr>
+            <a:r>
+              <a:t>▪ Warm Cream Modern Theme + High-Contrast Dark Mode</a:t>
             </a:r>
           </a:p>
           <a:p>
             <a:pPr>
               <a:spcBef>
-                <a:spcPts val="500"/>
+                <a:spcPts val="200"/>
               </a:spcBef>
               <a:defRPr sz="950">
                 <a:solidFill>
-                  <a:srgbClr val="CBD5E1"/>
-                </a:solidFill>
-              </a:defRPr>
-            </a:pPr>
-            <a:r>
-              <a:t>• Normalized Indexing: Indexed lookups on Join Codes (UPPER) and usernames ensure sub-millisecond retrieval.</a:t>
+                  <a:srgbClr val="FFFFFF"/>
+                </a:solidFill>
+              </a:defRPr>
+            </a:pPr>
+            <a:r>
+              <a:t>▪ Dynamic font scaling controls (A+/A-) for laboratory accessibility</a:t>
             </a:r>
           </a:p>
           <a:p>
             <a:pPr>
               <a:spcBef>
-                <a:spcPts val="500"/>
+                <a:spcPts val="200"/>
               </a:spcBef>
               <a:defRPr sz="950">
                 <a:solidFill>
-                  <a:srgbClr val="CBD5E1"/>
-                </a:solidFill>
-              </a:defRPr>
-            </a:pPr>
-            <a:r>
-              <a:t>• Durable Question Snapshotting: Questions are serialized as self-contained JSON strings inside `quizzes` to prevent external dependency drift.</a:t>
-            </a:r>
-          </a:p>
-          <a:p>
-            <a:pPr>
-              <a:spcBef>
-                <a:spcPts val="500"/>
-              </a:spcBef>
-              <a:defRPr sz="950">
-                <a:solidFill>
-                  <a:srgbClr val="CBD5E1"/>
-                </a:solidFill>
-              </a:defRPr>
-            </a:pPr>
-            <a:r>
-              <a:t>• Denormalized Submission Audit: Attempts store student name, quiz title, and authoring teacher to ensure immutable historical scorecards even if parent records change.</a:t>
-            </a:r>
-          </a:p>
-          <a:p>
-            <a:pPr>
-              <a:spcBef>
-                <a:spcPts val="500"/>
-              </a:spcBef>
-              <a:defRPr sz="950">
-                <a:solidFill>
-                  <a:srgbClr val="CBD5E1"/>
-                </a:solidFill>
-              </a:defRPr>
-            </a:pPr>
-            <a:r>
-              <a:t>• Automated Snapshot Engine: Backups are saved to `backups/quiz_system_*.db` protecting institutional records.</a:t>
+                  <a:srgbClr val="FFFFFF"/>
+                </a:solidFill>
+              </a:defRPr>
+            </a:pPr>
+            <a:r>
+              <a:t>▪ Focus Mode minimizing visual clutter during high-stakes assessments</a:t>
             </a:r>
           </a:p>
         </p:txBody>
@@ -10145,7 +12122,7 @@
               </a:defRPr>
             </a:pPr>
             <a:r>
-              <a:t>Initial UI &amp; End-to-End System Workflow</a:t>
+              <a:t>Modular Folder Architecture &amp; Technology Stack</a:t>
             </a:r>
           </a:p>
         </p:txBody>
@@ -10159,7 +12136,7 @@
         <p:spPr>
           <a:xfrm>
             <a:off x="731520" y="1645920"/>
-            <a:ext cx="3474720" cy="2148840"/>
+            <a:ext cx="5212080" cy="2148840"/>
           </a:xfrm>
           <a:prstGeom prst="roundRect">
             <a:avLst/>
@@ -10204,7 +12181,7 @@
         <p:spPr>
           <a:xfrm>
             <a:off x="731520" y="1645920"/>
-            <a:ext cx="3474720" cy="73152"/>
+            <a:ext cx="5212080" cy="73152"/>
           </a:xfrm>
           <a:prstGeom prst="rect">
             <a:avLst/>
@@ -10246,8 +12223,8 @@
         </p:nvSpPr>
         <p:spPr>
           <a:xfrm>
-            <a:off x="914400" y="1828800"/>
-            <a:ext cx="3108960" cy="1783080"/>
+            <a:off x="914400" y="1783080"/>
+            <a:ext cx="4846320" cy="1828800"/>
           </a:xfrm>
           <a:prstGeom prst="rect">
             <a:avLst/>
@@ -10261,29 +12238,104 @@
           <a:lstStyle/>
           <a:p>
             <a:pPr>
+              <a:defRPr sz="1100" b="1">
+                <a:solidFill>
+                  <a:srgbClr val="3B82F6"/>
+                </a:solidFill>
+              </a:defRPr>
+            </a:pPr>
+            <a:r>
+              <a:t>BACKEND CORE</a:t>
+            </a:r>
+          </a:p>
+          <a:p>
+            <a:pPr>
               <a:spcAft>
-                <a:spcPts val="600"/>
+                <a:spcPts val="400"/>
               </a:spcAft>
-              <a:defRPr sz="1100" b="1">
-                <a:solidFill>
-                  <a:srgbClr val="3B82F6"/>
-                </a:solidFill>
-              </a:defRPr>
-            </a:pPr>
-            <a:r>
-              <a:t>1. AUTHENTICATE</a:t>
-            </a:r>
-          </a:p>
-          <a:p>
-            <a:pPr>
-              <a:defRPr sz="1000">
+              <a:defRPr sz="1000" b="1">
+                <a:solidFill>
+                  <a:srgbClr val="FFFFFF"/>
+                </a:solidFill>
+              </a:defRPr>
+            </a:pPr>
+            <a:r>
+              <a:t>Stack: FastAPI + Uvicorn + SQLite</a:t>
+            </a:r>
+          </a:p>
+          <a:p>
+            <a:pPr>
+              <a:spcBef>
+                <a:spcPts val="100"/>
+              </a:spcBef>
+              <a:defRPr sz="900">
                 <a:solidFill>
                   <a:srgbClr val="CBD5E1"/>
                 </a:solidFill>
               </a:defRPr>
             </a:pPr>
             <a:r>
-              <a:t>User logs in as Student, Faculty, or Admin. Navigation immediately configures role-specific view.</a:t>
+              <a:t>▪ server.py: Unified REST API and WebSocket connection manager</a:t>
+            </a:r>
+          </a:p>
+          <a:p>
+            <a:pPr>
+              <a:spcBef>
+                <a:spcPts val="100"/>
+              </a:spcBef>
+              <a:defRPr sz="900">
+                <a:solidFill>
+                  <a:srgbClr val="CBD5E1"/>
+                </a:solidFill>
+              </a:defRPr>
+            </a:pPr>
+            <a:r>
+              <a:t>▪ backend/api/v1/: Enterprise modular routers (auth, quizzes, attempts, admin)</a:t>
+            </a:r>
+          </a:p>
+          <a:p>
+            <a:pPr>
+              <a:spcBef>
+                <a:spcPts val="100"/>
+              </a:spcBef>
+              <a:defRPr sz="900">
+                <a:solidFill>
+                  <a:srgbClr val="CBD5E1"/>
+                </a:solidFill>
+              </a:defRPr>
+            </a:pPr>
+            <a:r>
+              <a:t>▪ backend/core/: Database session factory, security JWT, telemetry middleware</a:t>
+            </a:r>
+          </a:p>
+          <a:p>
+            <a:pPr>
+              <a:spcBef>
+                <a:spcPts val="100"/>
+              </a:spcBef>
+              <a:defRPr sz="900">
+                <a:solidFill>
+                  <a:srgbClr val="CBD5E1"/>
+                </a:solidFill>
+              </a:defRPr>
+            </a:pPr>
+            <a:r>
+              <a:t>▪ backend/models/: Declarative multi-tenant SQLAlchemy domain models</a:t>
+            </a:r>
+          </a:p>
+          <a:p>
+            <a:pPr>
+              <a:spcBef>
+                <a:spcPts val="100"/>
+              </a:spcBef>
+              <a:defRPr sz="900">
+                <a:solidFill>
+                  <a:srgbClr val="CBD5E1"/>
+                </a:solidFill>
+              </a:defRPr>
+            </a:pPr>
+            <a:r>
+              <a:t>▪ ai_quiz_generator.py: Curriculum MCQ generation engine</a:t>
             </a:r>
           </a:p>
         </p:txBody>
@@ -10296,8 +12348,8 @@
         </p:nvSpPr>
         <p:spPr>
           <a:xfrm>
-            <a:off x="4343400" y="1645920"/>
-            <a:ext cx="3474720" cy="2148840"/>
+            <a:off x="6172200" y="1645920"/>
+            <a:ext cx="5212080" cy="2148840"/>
           </a:xfrm>
           <a:prstGeom prst="roundRect">
             <a:avLst/>
@@ -10341,8 +12393,8 @@
         </p:nvSpPr>
         <p:spPr>
           <a:xfrm>
-            <a:off x="4343400" y="1645920"/>
-            <a:ext cx="3474720" cy="73152"/>
+            <a:off x="6172200" y="1645920"/>
+            <a:ext cx="5212080" cy="73152"/>
           </a:xfrm>
           <a:prstGeom prst="rect">
             <a:avLst/>
@@ -10384,8 +12436,8 @@
         </p:nvSpPr>
         <p:spPr>
           <a:xfrm>
-            <a:off x="4526280" y="1828800"/>
-            <a:ext cx="3108960" cy="1783080"/>
+            <a:off x="6355080" y="1783080"/>
+            <a:ext cx="4846320" cy="1828800"/>
           </a:xfrm>
           <a:prstGeom prst="rect">
             <a:avLst/>
@@ -10399,29 +12451,104 @@
           <a:lstStyle/>
           <a:p>
             <a:pPr>
+              <a:defRPr sz="1100" b="1">
+                <a:solidFill>
+                  <a:srgbClr val="10B981"/>
+                </a:solidFill>
+              </a:defRPr>
+            </a:pPr>
+            <a:r>
+              <a:t>DESKTOP APPLICATION</a:t>
+            </a:r>
+          </a:p>
+          <a:p>
+            <a:pPr>
               <a:spcAft>
-                <a:spcPts val="600"/>
+                <a:spcPts val="400"/>
               </a:spcAft>
-              <a:defRPr sz="1100" b="1">
-                <a:solidFill>
-                  <a:srgbClr val="10B981"/>
-                </a:solidFill>
-              </a:defRPr>
-            </a:pPr>
-            <a:r>
-              <a:t>2. CREATE QUIZ</a:t>
-            </a:r>
-          </a:p>
-          <a:p>
-            <a:pPr>
-              <a:defRPr sz="1000">
+              <a:defRPr sz="1000" b="1">
+                <a:solidFill>
+                  <a:srgbClr val="FFFFFF"/>
+                </a:solidFill>
+              </a:defRPr>
+            </a:pPr>
+            <a:r>
+              <a:t>Stack: CustomTkinter GUI Engine</a:t>
+            </a:r>
+          </a:p>
+          <a:p>
+            <a:pPr>
+              <a:spcBef>
+                <a:spcPts val="100"/>
+              </a:spcBef>
+              <a:defRPr sz="900">
                 <a:solidFill>
                   <a:srgbClr val="CBD5E1"/>
                 </a:solidFill>
               </a:defRPr>
             </a:pPr>
             <a:r>
-              <a:t>Faculty designs quiz manually or triggers AI Generator. Server assigns unique Join Code (e.g. QZ-4821).</a:t>
+              <a:t>▪ desktop_app.py: Standalone native Windows client</a:t>
+            </a:r>
+          </a:p>
+          <a:p>
+            <a:pPr>
+              <a:spcBef>
+                <a:spcPts val="100"/>
+              </a:spcBef>
+              <a:defRPr sz="900">
+                <a:solidFill>
+                  <a:srgbClr val="CBD5E1"/>
+                </a:solidFill>
+              </a:defRPr>
+            </a:pPr>
+            <a:r>
+              <a:t>▪ DatabaseManager: Direct transactional SQLite integration</a:t>
+            </a:r>
+          </a:p>
+          <a:p>
+            <a:pPr>
+              <a:spcBef>
+                <a:spcPts val="100"/>
+              </a:spcBef>
+              <a:defRPr sz="900">
+                <a:solidFill>
+                  <a:srgbClr val="CBD5E1"/>
+                </a:solidFill>
+              </a:defRPr>
+            </a:pPr>
+            <a:r>
+              <a:t>▪ Strict Grid Alignment: Pixel-perfect 44px table rows and KPI cards</a:t>
+            </a:r>
+          </a:p>
+          <a:p>
+            <a:pPr>
+              <a:spcBef>
+                <a:spcPts val="100"/>
+              </a:spcBef>
+              <a:defRPr sz="900">
+                <a:solidFill>
+                  <a:srgbClr val="CBD5E1"/>
+                </a:solidFill>
+              </a:defRPr>
+            </a:pPr>
+            <a:r>
+              <a:t>▪ Theme Engine: Cream Modern Theme + High-Contrast Dark Mode</a:t>
+            </a:r>
+          </a:p>
+          <a:p>
+            <a:pPr>
+              <a:spcBef>
+                <a:spcPts val="100"/>
+              </a:spcBef>
+              <a:defRPr sz="900">
+                <a:solidFill>
+                  <a:srgbClr val="CBD5E1"/>
+                </a:solidFill>
+              </a:defRPr>
+            </a:pPr>
+            <a:r>
+              <a:t>▪ Accessibility: Dynamic font scaling (A+/A-) and focus modes</a:t>
             </a:r>
           </a:p>
         </p:txBody>
@@ -10434,8 +12561,8 @@
         </p:nvSpPr>
         <p:spPr>
           <a:xfrm>
-            <a:off x="7955280" y="1645920"/>
-            <a:ext cx="3474720" cy="2148840"/>
+            <a:off x="731520" y="3977639"/>
+            <a:ext cx="5212080" cy="2148840"/>
           </a:xfrm>
           <a:prstGeom prst="roundRect">
             <a:avLst/>
@@ -10479,8 +12606,8 @@
         </p:nvSpPr>
         <p:spPr>
           <a:xfrm>
-            <a:off x="7955280" y="1645920"/>
-            <a:ext cx="3474720" cy="73152"/>
+            <a:off x="731520" y="3977639"/>
+            <a:ext cx="5212080" cy="73152"/>
           </a:xfrm>
           <a:prstGeom prst="rect">
             <a:avLst/>
@@ -10522,8 +12649,8 @@
         </p:nvSpPr>
         <p:spPr>
           <a:xfrm>
-            <a:off x="8138160" y="1828800"/>
-            <a:ext cx="3108960" cy="1783080"/>
+            <a:off x="914400" y="4114799"/>
+            <a:ext cx="4846320" cy="1828800"/>
           </a:xfrm>
           <a:prstGeom prst="rect">
             <a:avLst/>
@@ -10537,29 +12664,89 @@
           <a:lstStyle/>
           <a:p>
             <a:pPr>
+              <a:defRPr sz="1100" b="1">
+                <a:solidFill>
+                  <a:srgbClr val="F59E0B"/>
+                </a:solidFill>
+              </a:defRPr>
+            </a:pPr>
+            <a:r>
+              <a:t>WEB APPLICATION</a:t>
+            </a:r>
+          </a:p>
+          <a:p>
+            <a:pPr>
               <a:spcAft>
-                <a:spcPts val="600"/>
+                <a:spcPts val="400"/>
               </a:spcAft>
-              <a:defRPr sz="1100" b="1">
-                <a:solidFill>
-                  <a:srgbClr val="F59E0B"/>
-                </a:solidFill>
-              </a:defRPr>
-            </a:pPr>
-            <a:r>
-              <a:t>3. ENTER CODE</a:t>
-            </a:r>
-          </a:p>
-          <a:p>
-            <a:pPr>
-              <a:defRPr sz="1000">
+              <a:defRPr sz="1000" b="1">
+                <a:solidFill>
+                  <a:srgbClr val="FFFFFF"/>
+                </a:solidFill>
+              </a:defRPr>
+            </a:pPr>
+            <a:r>
+              <a:t>Stack: HTML5 + Vanilla CSS + JS</a:t>
+            </a:r>
+          </a:p>
+          <a:p>
+            <a:pPr>
+              <a:spcBef>
+                <a:spcPts val="100"/>
+              </a:spcBef>
+              <a:defRPr sz="900">
                 <a:solidFill>
                   <a:srgbClr val="CBD5E1"/>
                 </a:solidFill>
               </a:defRPr>
             </a:pPr>
             <a:r>
-              <a:t>Student inputs 6-char Join Code. Assessment metadata and questions load into Candidate Arena in &lt;25ms.</a:t>
+              <a:t>▪ index.html: High-performance single page assessment portal</a:t>
+            </a:r>
+          </a:p>
+          <a:p>
+            <a:pPr>
+              <a:spcBef>
+                <a:spcPts val="100"/>
+              </a:spcBef>
+              <a:defRPr sz="900">
+                <a:solidFill>
+                  <a:srgbClr val="CBD5E1"/>
+                </a:solidFill>
+              </a:defRPr>
+            </a:pPr>
+            <a:r>
+              <a:t>▪ assets/css/: Modular design tokens (variables, quiz-engine, admin, examiner)</a:t>
+            </a:r>
+          </a:p>
+          <a:p>
+            <a:pPr>
+              <a:spcBef>
+                <a:spcPts val="100"/>
+              </a:spcBef>
+              <a:defRPr sz="900">
+                <a:solidFill>
+                  <a:srgbClr val="CBD5E1"/>
+                </a:solidFill>
+              </a:defRPr>
+            </a:pPr>
+            <a:r>
+              <a:t>▪ assets/js/: Segregated controllers (auth.js, app.js, quiz-engine.js, admin.js)</a:t>
+            </a:r>
+          </a:p>
+          <a:p>
+            <a:pPr>
+              <a:spcBef>
+                <a:spcPts val="100"/>
+              </a:spcBef>
+              <a:defRPr sz="900">
+                <a:solidFill>
+                  <a:srgbClr val="CBD5E1"/>
+                </a:solidFill>
+              </a:defRPr>
+            </a:pPr>
+            <a:r>
+              <a:t>▪ sw.js &amp; manifest.json: Mobile progressive web app enablement</a:t>
             </a:r>
           </a:p>
         </p:txBody>
@@ -10572,8 +12759,8 @@
         </p:nvSpPr>
         <p:spPr>
           <a:xfrm>
-            <a:off x="731520" y="3977639"/>
-            <a:ext cx="3474720" cy="2148840"/>
+            <a:off x="6172200" y="3977639"/>
+            <a:ext cx="5212080" cy="2148840"/>
           </a:xfrm>
           <a:prstGeom prst="roundRect">
             <a:avLst/>
@@ -10617,146 +12804,8 @@
         </p:nvSpPr>
         <p:spPr>
           <a:xfrm>
-            <a:off x="731520" y="3977639"/>
-            <a:ext cx="3474720" cy="73152"/>
-          </a:xfrm>
-          <a:prstGeom prst="rect">
-            <a:avLst/>
-          </a:prstGeom>
-          <a:solidFill>
-            <a:srgbClr val="EF4444"/>
-          </a:solidFill>
-          <a:ln>
-            <a:noFill/>
-          </a:ln>
-        </p:spPr>
-        <p:style>
-          <a:lnRef idx="1">
-            <a:schemeClr val="accent1"/>
-          </a:lnRef>
-          <a:fillRef idx="3">
-            <a:schemeClr val="accent1"/>
-          </a:fillRef>
-          <a:effectRef idx="2">
-            <a:schemeClr val="accent1"/>
-          </a:effectRef>
-          <a:fontRef idx="minor">
-            <a:schemeClr val="lt1"/>
-          </a:fontRef>
-        </p:style>
-        <p:txBody>
-          <a:bodyPr rtlCol="0" anchor="ctr"/>
-          <a:lstStyle/>
-          <a:p>
-            <a:pPr algn="ctr"/>
-          </a:p>
-        </p:txBody>
-      </p:sp>
-      <p:sp>
-        <p:nvSpPr>
-          <p:cNvPr id="16" name="TextBox 15"/>
-          <p:cNvSpPr txBox="1"/>
-          <p:nvPr/>
-        </p:nvSpPr>
-        <p:spPr>
-          <a:xfrm>
-            <a:off x="914400" y="4160519"/>
-            <a:ext cx="3108960" cy="1783080"/>
-          </a:xfrm>
-          <a:prstGeom prst="rect">
-            <a:avLst/>
-          </a:prstGeom>
-          <a:noFill/>
-        </p:spPr>
-        <p:txBody>
-          <a:bodyPr wrap="square">
-            <a:spAutoFit/>
-          </a:bodyPr>
-          <a:lstStyle/>
-          <a:p>
-            <a:pPr>
-              <a:spcAft>
-                <a:spcPts val="600"/>
-              </a:spcAft>
-              <a:defRPr sz="1100" b="1">
-                <a:solidFill>
-                  <a:srgbClr val="EF4444"/>
-                </a:solidFill>
-              </a:defRPr>
-            </a:pPr>
-            <a:r>
-              <a:t>4. TAKE &amp; MONITOR</a:t>
-            </a:r>
-          </a:p>
-          <a:p>
-            <a:pPr>
-              <a:defRPr sz="1000">
-                <a:solidFill>
-                  <a:srgbClr val="CBD5E1"/>
-                </a:solidFill>
-              </a:defRPr>
-            </a:pPr>
-            <a:r>
-              <a:t>Countdown timer runs authoritatively. Client anti-cheat monitors focus and logs tab blurs.</a:t>
-            </a:r>
-          </a:p>
-        </p:txBody>
-      </p:sp>
-      <p:sp>
-        <p:nvSpPr>
-          <p:cNvPr id="17" name="Rounded Rectangle 16"/>
-          <p:cNvSpPr/>
-          <p:nvPr/>
-        </p:nvSpPr>
-        <p:spPr>
-          <a:xfrm>
-            <a:off x="4343400" y="3977639"/>
-            <a:ext cx="3474720" cy="2148840"/>
-          </a:xfrm>
-          <a:prstGeom prst="roundRect">
-            <a:avLst/>
-          </a:prstGeom>
-          <a:solidFill>
-            <a:srgbClr val="1E293B"/>
-          </a:solidFill>
-          <a:ln w="12700">
-            <a:solidFill>
-              <a:srgbClr val="334155"/>
-            </a:solidFill>
-          </a:ln>
-        </p:spPr>
-        <p:style>
-          <a:lnRef idx="1">
-            <a:schemeClr val="accent1"/>
-          </a:lnRef>
-          <a:fillRef idx="3">
-            <a:schemeClr val="accent1"/>
-          </a:fillRef>
-          <a:effectRef idx="2">
-            <a:schemeClr val="accent1"/>
-          </a:effectRef>
-          <a:fontRef idx="minor">
-            <a:schemeClr val="lt1"/>
-          </a:fontRef>
-        </p:style>
-        <p:txBody>
-          <a:bodyPr rtlCol="0" anchor="ctr"/>
-          <a:lstStyle/>
-          <a:p>
-            <a:pPr algn="ctr"/>
-          </a:p>
-        </p:txBody>
-      </p:sp>
-      <p:sp>
-        <p:nvSpPr>
-          <p:cNvPr id="18" name="Rectangle 17"/>
-          <p:cNvSpPr/>
-          <p:nvPr/>
-        </p:nvSpPr>
-        <p:spPr>
-          <a:xfrm>
-            <a:off x="4343400" y="3977639"/>
-            <a:ext cx="3474720" cy="73152"/>
+            <a:off x="6172200" y="3977639"/>
+            <a:ext cx="5212080" cy="73152"/>
           </a:xfrm>
           <a:prstGeom prst="rect">
             <a:avLst/>
@@ -10792,14 +12841,14 @@
       </p:sp>
       <p:sp>
         <p:nvSpPr>
-          <p:cNvPr id="19" name="TextBox 18"/>
+          <p:cNvPr id="16" name="TextBox 15"/>
           <p:cNvSpPr txBox="1"/>
           <p:nvPr/>
         </p:nvSpPr>
         <p:spPr>
           <a:xfrm>
-            <a:off x="4526280" y="4160519"/>
-            <a:ext cx="3108960" cy="1783080"/>
+            <a:off x="6355080" y="4114799"/>
+            <a:ext cx="4846320" cy="1828800"/>
           </a:xfrm>
           <a:prstGeom prst="rect">
             <a:avLst/>
@@ -10813,167 +12862,104 @@
           <a:lstStyle/>
           <a:p>
             <a:pPr>
+              <a:defRPr sz="1100" b="1">
+                <a:solidFill>
+                  <a:srgbClr val="8B5CF6"/>
+                </a:solidFill>
+              </a:defRPr>
+            </a:pPr>
+            <a:r>
+              <a:t>QUALITY &amp; TEST HARNESS</a:t>
+            </a:r>
+          </a:p>
+          <a:p>
+            <a:pPr>
               <a:spcAft>
-                <a:spcPts val="600"/>
+                <a:spcPts val="400"/>
               </a:spcAft>
-              <a:defRPr sz="1100" b="1">
-                <a:solidFill>
-                  <a:srgbClr val="8B5CF6"/>
-                </a:solidFill>
-              </a:defRPr>
-            </a:pPr>
-            <a:r>
-              <a:t>5. AUTO-GRADE</a:t>
-            </a:r>
-          </a:p>
-          <a:p>
-            <a:pPr>
-              <a:defRPr sz="1000">
+              <a:defRPr sz="1000" b="1">
+                <a:solidFill>
+                  <a:srgbClr val="FFFFFF"/>
+                </a:solidFill>
+              </a:defRPr>
+            </a:pPr>
+            <a:r>
+              <a:t>Stack: Pytest Automated Suite</a:t>
+            </a:r>
+          </a:p>
+          <a:p>
+            <a:pPr>
+              <a:spcBef>
+                <a:spcPts val="100"/>
+              </a:spcBef>
+              <a:defRPr sz="900">
                 <a:solidFill>
                   <a:srgbClr val="CBD5E1"/>
                 </a:solidFill>
               </a:defRPr>
             </a:pPr>
             <a:r>
-              <a:t>Candidate submits test. Server auto-grades in ~25ms and presents detailed scorecard with answer rationale.</a:t>
-            </a:r>
-          </a:p>
-        </p:txBody>
-      </p:sp>
-      <p:sp>
-        <p:nvSpPr>
-          <p:cNvPr id="20" name="Rounded Rectangle 19"/>
-          <p:cNvSpPr/>
-          <p:nvPr/>
-        </p:nvSpPr>
-        <p:spPr>
-          <a:xfrm>
-            <a:off x="7955280" y="3977639"/>
-            <a:ext cx="3474720" cy="2148840"/>
-          </a:xfrm>
-          <a:prstGeom prst="roundRect">
-            <a:avLst/>
-          </a:prstGeom>
-          <a:solidFill>
-            <a:srgbClr val="1E293B"/>
-          </a:solidFill>
-          <a:ln w="12700">
-            <a:solidFill>
-              <a:srgbClr val="334155"/>
-            </a:solidFill>
-          </a:ln>
-        </p:spPr>
-        <p:style>
-          <a:lnRef idx="1">
-            <a:schemeClr val="accent1"/>
-          </a:lnRef>
-          <a:fillRef idx="3">
-            <a:schemeClr val="accent1"/>
-          </a:fillRef>
-          <a:effectRef idx="2">
-            <a:schemeClr val="accent1"/>
-          </a:effectRef>
-          <a:fontRef idx="minor">
-            <a:schemeClr val="lt1"/>
-          </a:fontRef>
-        </p:style>
-        <p:txBody>
-          <a:bodyPr rtlCol="0" anchor="ctr"/>
-          <a:lstStyle/>
-          <a:p>
-            <a:pPr algn="ctr"/>
-          </a:p>
-        </p:txBody>
-      </p:sp>
-      <p:sp>
-        <p:nvSpPr>
-          <p:cNvPr id="21" name="Rectangle 20"/>
-          <p:cNvSpPr/>
-          <p:nvPr/>
-        </p:nvSpPr>
-        <p:spPr>
-          <a:xfrm>
-            <a:off x="7955280" y="3977639"/>
-            <a:ext cx="3474720" cy="73152"/>
-          </a:xfrm>
-          <a:prstGeom prst="rect">
-            <a:avLst/>
-          </a:prstGeom>
-          <a:solidFill>
-            <a:srgbClr val="0EA5E9"/>
-          </a:solidFill>
-          <a:ln>
-            <a:noFill/>
-          </a:ln>
-        </p:spPr>
-        <p:style>
-          <a:lnRef idx="1">
-            <a:schemeClr val="accent1"/>
-          </a:lnRef>
-          <a:fillRef idx="3">
-            <a:schemeClr val="accent1"/>
-          </a:fillRef>
-          <a:effectRef idx="2">
-            <a:schemeClr val="accent1"/>
-          </a:effectRef>
-          <a:fontRef idx="minor">
-            <a:schemeClr val="lt1"/>
-          </a:fontRef>
-        </p:style>
-        <p:txBody>
-          <a:bodyPr rtlCol="0" anchor="ctr"/>
-          <a:lstStyle/>
-          <a:p>
-            <a:pPr algn="ctr"/>
-          </a:p>
-        </p:txBody>
-      </p:sp>
-      <p:sp>
-        <p:nvSpPr>
-          <p:cNvPr id="22" name="TextBox 21"/>
-          <p:cNvSpPr txBox="1"/>
-          <p:nvPr/>
-        </p:nvSpPr>
-        <p:spPr>
-          <a:xfrm>
-            <a:off x="8138160" y="4160519"/>
-            <a:ext cx="3108960" cy="1783080"/>
-          </a:xfrm>
-          <a:prstGeom prst="rect">
-            <a:avLst/>
-          </a:prstGeom>
-          <a:noFill/>
-        </p:spPr>
-        <p:txBody>
-          <a:bodyPr wrap="square">
-            <a:spAutoFit/>
-          </a:bodyPr>
-          <a:lstStyle/>
-          <a:p>
-            <a:pPr>
-              <a:spcAft>
-                <a:spcPts val="600"/>
-              </a:spcAft>
-              <a:defRPr sz="1100" b="1">
-                <a:solidFill>
-                  <a:srgbClr val="0EA5E9"/>
-                </a:solidFill>
-              </a:defRPr>
-            </a:pPr>
-            <a:r>
-              <a:t>6. AUDIT &amp; EXPORT</a:t>
-            </a:r>
-          </a:p>
-          <a:p>
-            <a:pPr>
-              <a:defRPr sz="1000">
+              <a:t>▪ tests/test_web_auth.py: Web API contract verification</a:t>
+            </a:r>
+          </a:p>
+          <a:p>
+            <a:pPr>
+              <a:spcBef>
+                <a:spcPts val="100"/>
+              </a:spcBef>
+              <a:defRPr sz="900">
                 <a:solidFill>
                   <a:srgbClr val="CBD5E1"/>
                 </a:solidFill>
               </a:defRPr>
             </a:pPr>
             <a:r>
-              <a:t>Teacher inspects class gradebook. Admin analyzes platform telemetry and streams roster &amp; attempt CSVs.</a:t>
+              <a:t>▪ tests/test_desktop_auth.py: Desktop authentication &amp; RBAC tabs</a:t>
+            </a:r>
+          </a:p>
+          <a:p>
+            <a:pPr>
+              <a:spcBef>
+                <a:spcPts val="100"/>
+              </a:spcBef>
+              <a:defRPr sz="900">
+                <a:solidFill>
+                  <a:srgbClr val="CBD5E1"/>
+                </a:solidFill>
+              </a:defRPr>
+            </a:pPr>
+            <a:r>
+              <a:t>▪ tests/test_admin_panel.py: Admin telemetry and user report verification</a:t>
+            </a:r>
+          </a:p>
+          <a:p>
+            <a:pPr>
+              <a:spcBef>
+                <a:spcPts val="100"/>
+              </a:spcBef>
+              <a:defRPr sz="900">
+                <a:solidFill>
+                  <a:srgbClr val="CBD5E1"/>
+                </a:solidFill>
+              </a:defRPr>
+            </a:pPr>
+            <a:r>
+              <a:t>▪ tests/test_join_code_workflow.py: End-to-end quiz code workflow</a:t>
+            </a:r>
+          </a:p>
+          <a:p>
+            <a:pPr>
+              <a:spcBef>
+                <a:spcPts val="100"/>
+              </a:spcBef>
+              <a:defRPr sz="900">
+                <a:solidFill>
+                  <a:srgbClr val="CBD5E1"/>
+                </a:solidFill>
+              </a:defRPr>
+            </a:pPr>
+            <a:r>
+              <a:t>▪ 22 / 22 Tests Passing with 0 errors</a:t>
             </a:r>
           </a:p>
         </p:txBody>
@@ -11104,7 +13090,7 @@
               </a:defRPr>
             </a:pPr>
             <a:r>
-              <a:t>CRUD Operations Aligned with Quality Goals</a:t>
+              <a:t>Core Modules &amp; Feature Breakdown</a:t>
             </a:r>
           </a:p>
         </p:txBody>
@@ -11118,7 +13104,7 @@
         <p:spPr>
           <a:xfrm>
             <a:off x="731520" y="1645920"/>
-            <a:ext cx="5212080" cy="2148840"/>
+            <a:ext cx="3474720" cy="2148840"/>
           </a:xfrm>
           <a:prstGeom prst="roundRect">
             <a:avLst/>
@@ -11163,7 +13149,7 @@
         <p:spPr>
           <a:xfrm>
             <a:off x="731520" y="1645920"/>
-            <a:ext cx="5212080" cy="73152"/>
+            <a:ext cx="3474720" cy="73152"/>
           </a:xfrm>
           <a:prstGeom prst="rect">
             <a:avLst/>
@@ -11205,8 +13191,8 @@
         </p:nvSpPr>
         <p:spPr>
           <a:xfrm>
-            <a:off x="914400" y="1783080"/>
-            <a:ext cx="4846320" cy="1828800"/>
+            <a:off x="914400" y="1828800"/>
+            <a:ext cx="3108960" cy="1783080"/>
           </a:xfrm>
           <a:prstGeom prst="rect">
             <a:avLst/>
@@ -11221,7 +13207,7 @@
           <a:p>
             <a:pPr>
               <a:spcAft>
-                <a:spcPts val="400"/>
+                <a:spcPts val="600"/>
               </a:spcAft>
               <a:defRPr sz="1100" b="1">
                 <a:solidFill>
@@ -11230,67 +13216,19 @@
               </a:defRPr>
             </a:pPr>
             <a:r>
-              <a:t>USER MANAGEMENT</a:t>
-            </a:r>
-          </a:p>
-          <a:p>
-            <a:pPr>
-              <a:spcBef>
-                <a:spcPts val="200"/>
-              </a:spcBef>
-              <a:defRPr sz="950">
-                <a:solidFill>
-                  <a:srgbClr val="FFFFFF"/>
-                </a:solidFill>
-              </a:defRPr>
-            </a:pPr>
-            <a:r>
-              <a:t>• CREATE: Register accounts via /api/auth/register or Desktop UI</a:t>
-            </a:r>
-          </a:p>
-          <a:p>
-            <a:pPr>
-              <a:spcBef>
-                <a:spcPts val="200"/>
-              </a:spcBef>
-              <a:defRPr sz="950">
-                <a:solidFill>
-                  <a:srgbClr val="FFFFFF"/>
-                </a:solidFill>
-              </a:defRPr>
-            </a:pPr>
-            <a:r>
-              <a:t>• READ: Authenticate (/api/auth/login), Roster (/api/admin/users)</a:t>
-            </a:r>
-          </a:p>
-          <a:p>
-            <a:pPr>
-              <a:spcBef>
-                <a:spcPts val="200"/>
-              </a:spcBef>
-              <a:defRPr sz="950">
-                <a:solidFill>
-                  <a:srgbClr val="FFFFFF"/>
-                </a:solidFill>
-              </a:defRPr>
-            </a:pPr>
-            <a:r>
-              <a:t>• UPDATE: Department assignment, accommodation time buffers</a:t>
-            </a:r>
-          </a:p>
-          <a:p>
-            <a:pPr>
-              <a:spcBef>
-                <a:spcPts val="200"/>
-              </a:spcBef>
-              <a:defRPr sz="950">
-                <a:solidFill>
-                  <a:srgbClr val="FFFFFF"/>
-                </a:solidFill>
-              </a:defRPr>
-            </a:pPr>
-            <a:r>
-              <a:t>• DELETE: Soft-deactivate user accounts and audit permissions</a:t>
+              <a:t>M1: Identity &amp; Authentication</a:t>
+            </a:r>
+          </a:p>
+          <a:p>
+            <a:pPr>
+              <a:defRPr sz="1000">
+                <a:solidFill>
+                  <a:srgbClr val="CBD5E1"/>
+                </a:solidFill>
+              </a:defRPr>
+            </a:pPr>
+            <a:r>
+              <a:t>Role-based sign-in and registration for Student, Faculty, and Admin. Dynamically alters client navigation tabs according to authenticated persona.</a:t>
             </a:r>
           </a:p>
         </p:txBody>
@@ -11303,8 +13241,8 @@
         </p:nvSpPr>
         <p:spPr>
           <a:xfrm>
-            <a:off x="6172200" y="1645920"/>
-            <a:ext cx="5212080" cy="2148840"/>
+            <a:off x="4343400" y="1645920"/>
+            <a:ext cx="3474720" cy="2148840"/>
           </a:xfrm>
           <a:prstGeom prst="roundRect">
             <a:avLst/>
@@ -11348,8 +13286,8 @@
         </p:nvSpPr>
         <p:spPr>
           <a:xfrm>
-            <a:off x="6172200" y="1645920"/>
-            <a:ext cx="5212080" cy="73152"/>
+            <a:off x="4343400" y="1645920"/>
+            <a:ext cx="3474720" cy="73152"/>
           </a:xfrm>
           <a:prstGeom prst="rect">
             <a:avLst/>
@@ -11391,8 +13329,8 @@
         </p:nvSpPr>
         <p:spPr>
           <a:xfrm>
-            <a:off x="6355080" y="1783080"/>
-            <a:ext cx="4846320" cy="1828800"/>
+            <a:off x="4526280" y="1828800"/>
+            <a:ext cx="3108960" cy="1783080"/>
           </a:xfrm>
           <a:prstGeom prst="rect">
             <a:avLst/>
@@ -11407,7 +13345,7 @@
           <a:p>
             <a:pPr>
               <a:spcAft>
-                <a:spcPts val="400"/>
+                <a:spcPts val="600"/>
               </a:spcAft>
               <a:defRPr sz="1100" b="1">
                 <a:solidFill>
@@ -11416,67 +13354,19 @@
               </a:defRPr>
             </a:pPr>
             <a:r>
-              <a:t>ASSESSMENT MANAGEMENT</a:t>
-            </a:r>
-          </a:p>
-          <a:p>
-            <a:pPr>
-              <a:spcBef>
-                <a:spcPts val="200"/>
-              </a:spcBef>
-              <a:defRPr sz="950">
-                <a:solidFill>
-                  <a:srgbClr val="FFFFFF"/>
-                </a:solidFill>
-              </a:defRPr>
-            </a:pPr>
-            <a:r>
-              <a:t>• CREATE: Manual authoring (/api/quizzes) or AI Wizard (/api/ai-generate)</a:t>
-            </a:r>
-          </a:p>
-          <a:p>
-            <a:pPr>
-              <a:spcBef>
-                <a:spcPts val="200"/>
-              </a:spcBef>
-              <a:defRPr sz="950">
-                <a:solidFill>
-                  <a:srgbClr val="FFFFFF"/>
-                </a:solidFill>
-              </a:defRPr>
-            </a:pPr>
-            <a:r>
-              <a:t>• READ: Code resolver (/api/quizzes/code/{code}), Quiz listings</a:t>
-            </a:r>
-          </a:p>
-          <a:p>
-            <a:pPr>
-              <a:spcBef>
-                <a:spcPts val="200"/>
-              </a:spcBef>
-              <a:defRPr sz="950">
-                <a:solidFill>
-                  <a:srgbClr val="FFFFFF"/>
-                </a:solidFill>
-              </a:defRPr>
-            </a:pPr>
-            <a:r>
-              <a:t>• UPDATE: Modify time duration, passing mark, or question contents</a:t>
-            </a:r>
-          </a:p>
-          <a:p>
-            <a:pPr>
-              <a:spcBef>
-                <a:spcPts val="200"/>
-              </a:spcBef>
-              <a:defRPr sz="950">
-                <a:solidFill>
-                  <a:srgbClr val="FFFFFF"/>
-                </a:solidFill>
-              </a:defRPr>
-            </a:pPr>
-            <a:r>
-              <a:t>• DELETE: Archive assessment and withdraw public Join Code</a:t>
+              <a:t>M2: Examiner Studio &amp; AI Wizard</a:t>
+            </a:r>
+          </a:p>
+          <a:p>
+            <a:pPr>
+              <a:defRPr sz="1000">
+                <a:solidFill>
+                  <a:srgbClr val="CBD5E1"/>
+                </a:solidFill>
+              </a:defRPr>
+            </a:pPr>
+            <a:r>
+              <a:t>Faculty test creator supporting manual MCQ authoring or AI syllabus synthesis. Configures duration, passing score, category, and deterministic 6-character Join Code.</a:t>
             </a:r>
           </a:p>
         </p:txBody>
@@ -11489,8 +13379,8 @@
         </p:nvSpPr>
         <p:spPr>
           <a:xfrm>
-            <a:off x="731520" y="3977639"/>
-            <a:ext cx="5212080" cy="2148840"/>
+            <a:off x="7955280" y="1645920"/>
+            <a:ext cx="3474720" cy="2148840"/>
           </a:xfrm>
           <a:prstGeom prst="roundRect">
             <a:avLst/>
@@ -11534,8 +13424,8 @@
         </p:nvSpPr>
         <p:spPr>
           <a:xfrm>
-            <a:off x="731520" y="3977639"/>
-            <a:ext cx="5212080" cy="73152"/>
+            <a:off x="7955280" y="1645920"/>
+            <a:ext cx="3474720" cy="73152"/>
           </a:xfrm>
           <a:prstGeom prst="rect">
             <a:avLst/>
@@ -11577,8 +13467,8 @@
         </p:nvSpPr>
         <p:spPr>
           <a:xfrm>
-            <a:off x="914400" y="4114799"/>
-            <a:ext cx="4846320" cy="1828800"/>
+            <a:off x="8138160" y="1828800"/>
+            <a:ext cx="3108960" cy="1783080"/>
           </a:xfrm>
           <a:prstGeom prst="rect">
             <a:avLst/>
@@ -11593,7 +13483,7 @@
           <a:p>
             <a:pPr>
               <a:spcAft>
-                <a:spcPts val="400"/>
+                <a:spcPts val="600"/>
               </a:spcAft>
               <a:defRPr sz="1100" b="1">
                 <a:solidFill>
@@ -11602,67 +13492,19 @@
               </a:defRPr>
             </a:pPr>
             <a:r>
-              <a:t>SUBMISSIONS &amp; AUDIT</a:t>
-            </a:r>
-          </a:p>
-          <a:p>
-            <a:pPr>
-              <a:spcBef>
-                <a:spcPts val="200"/>
-              </a:spcBef>
-              <a:defRPr sz="950">
-                <a:solidFill>
-                  <a:srgbClr val="FFFFFF"/>
-                </a:solidFill>
-              </a:defRPr>
-            </a:pPr>
-            <a:r>
-              <a:t>• CREATE: Atomic test submission (/api/quizzes/{id}/submit)</a:t>
-            </a:r>
-          </a:p>
-          <a:p>
-            <a:pPr>
-              <a:spcBef>
-                <a:spcPts val="200"/>
-              </a:spcBef>
-              <a:defRPr sz="950">
-                <a:solidFill>
-                  <a:srgbClr val="FFFFFF"/>
-                </a:solidFill>
-              </a:defRPr>
-            </a:pPr>
-            <a:r>
-              <a:t>• READ: Teacher Gradebook (/api/teacher/reports), Candidate Scorecards</a:t>
-            </a:r>
-          </a:p>
-          <a:p>
-            <a:pPr>
-              <a:spcBef>
-                <a:spcPts val="200"/>
-              </a:spcBef>
-              <a:defRPr sz="950">
-                <a:solidFill>
-                  <a:srgbClr val="FFFFFF"/>
-                </a:solidFill>
-              </a:defRPr>
-            </a:pPr>
-            <a:r>
-              <a:t>• UPDATE: Durable progress autosaving during active exam sessions</a:t>
-            </a:r>
-          </a:p>
-          <a:p>
-            <a:pPr>
-              <a:spcBef>
-                <a:spcPts val="200"/>
-              </a:spcBef>
-              <a:defRPr sz="950">
-                <a:solidFill>
-                  <a:srgbClr val="FFFFFF"/>
-                </a:solidFill>
-              </a:defRPr>
-            </a:pPr>
-            <a:r>
-              <a:t>• DELETE: Controlled audit retention purge</a:t>
+              <a:t>M3: Candidate Assessment Arena</a:t>
+            </a:r>
+          </a:p>
+          <a:p>
+            <a:pPr>
+              <a:defRPr sz="1000">
+                <a:solidFill>
+                  <a:srgbClr val="CBD5E1"/>
+                </a:solidFill>
+              </a:defRPr>
+            </a:pPr>
+            <a:r>
+              <a:t>Quick test join via code. Delivers questions with interactive palette, authoritative server countdown timer, and automatic submission upon deadline expiry.</a:t>
             </a:r>
           </a:p>
         </p:txBody>
@@ -11675,8 +13517,8 @@
         </p:nvSpPr>
         <p:spPr>
           <a:xfrm>
-            <a:off x="6172200" y="3977639"/>
-            <a:ext cx="5212080" cy="2148840"/>
+            <a:off x="731520" y="3977639"/>
+            <a:ext cx="3474720" cy="2148840"/>
           </a:xfrm>
           <a:prstGeom prst="roundRect">
             <a:avLst/>
@@ -11720,8 +13562,146 @@
         </p:nvSpPr>
         <p:spPr>
           <a:xfrm>
-            <a:off x="6172200" y="3977639"/>
-            <a:ext cx="5212080" cy="73152"/>
+            <a:off x="731520" y="3977639"/>
+            <a:ext cx="3474720" cy="73152"/>
+          </a:xfrm>
+          <a:prstGeom prst="rect">
+            <a:avLst/>
+          </a:prstGeom>
+          <a:solidFill>
+            <a:srgbClr val="EF4444"/>
+          </a:solidFill>
+          <a:ln>
+            <a:noFill/>
+          </a:ln>
+        </p:spPr>
+        <p:style>
+          <a:lnRef idx="1">
+            <a:schemeClr val="accent1"/>
+          </a:lnRef>
+          <a:fillRef idx="3">
+            <a:schemeClr val="accent1"/>
+          </a:fillRef>
+          <a:effectRef idx="2">
+            <a:schemeClr val="accent1"/>
+          </a:effectRef>
+          <a:fontRef idx="minor">
+            <a:schemeClr val="lt1"/>
+          </a:fontRef>
+        </p:style>
+        <p:txBody>
+          <a:bodyPr rtlCol="0" anchor="ctr"/>
+          <a:lstStyle/>
+          <a:p>
+            <a:pPr algn="ctr"/>
+          </a:p>
+        </p:txBody>
+      </p:sp>
+      <p:sp>
+        <p:nvSpPr>
+          <p:cNvPr id="16" name="TextBox 15"/>
+          <p:cNvSpPr txBox="1"/>
+          <p:nvPr/>
+        </p:nvSpPr>
+        <p:spPr>
+          <a:xfrm>
+            <a:off x="914400" y="4160519"/>
+            <a:ext cx="3108960" cy="1783080"/>
+          </a:xfrm>
+          <a:prstGeom prst="rect">
+            <a:avLst/>
+          </a:prstGeom>
+          <a:noFill/>
+        </p:spPr>
+        <p:txBody>
+          <a:bodyPr wrap="square">
+            <a:spAutoFit/>
+          </a:bodyPr>
+          <a:lstStyle/>
+          <a:p>
+            <a:pPr>
+              <a:spcAft>
+                <a:spcPts val="600"/>
+              </a:spcAft>
+              <a:defRPr sz="1100" b="1">
+                <a:solidFill>
+                  <a:srgbClr val="EF4444"/>
+                </a:solidFill>
+              </a:defRPr>
+            </a:pPr>
+            <a:r>
+              <a:t>M4: Anti-Cheat Proctoring Hub</a:t>
+            </a:r>
+          </a:p>
+          <a:p>
+            <a:pPr>
+              <a:defRPr sz="1000">
+                <a:solidFill>
+                  <a:srgbClr val="CBD5E1"/>
+                </a:solidFill>
+              </a:defRPr>
+            </a:pPr>
+            <a:r>
+              <a:t>Active focus tracking monitors window blur and tab switching during exams. Violations increment in real time and are permanently audited into submission records.</a:t>
+            </a:r>
+          </a:p>
+        </p:txBody>
+      </p:sp>
+      <p:sp>
+        <p:nvSpPr>
+          <p:cNvPr id="17" name="Rounded Rectangle 16"/>
+          <p:cNvSpPr/>
+          <p:nvPr/>
+        </p:nvSpPr>
+        <p:spPr>
+          <a:xfrm>
+            <a:off x="4343400" y="3977639"/>
+            <a:ext cx="3474720" cy="2148840"/>
+          </a:xfrm>
+          <a:prstGeom prst="roundRect">
+            <a:avLst/>
+          </a:prstGeom>
+          <a:solidFill>
+            <a:srgbClr val="1E293B"/>
+          </a:solidFill>
+          <a:ln w="12700">
+            <a:solidFill>
+              <a:srgbClr val="334155"/>
+            </a:solidFill>
+          </a:ln>
+        </p:spPr>
+        <p:style>
+          <a:lnRef idx="1">
+            <a:schemeClr val="accent1"/>
+          </a:lnRef>
+          <a:fillRef idx="3">
+            <a:schemeClr val="accent1"/>
+          </a:fillRef>
+          <a:effectRef idx="2">
+            <a:schemeClr val="accent1"/>
+          </a:effectRef>
+          <a:fontRef idx="minor">
+            <a:schemeClr val="lt1"/>
+          </a:fontRef>
+        </p:style>
+        <p:txBody>
+          <a:bodyPr rtlCol="0" anchor="ctr"/>
+          <a:lstStyle/>
+          <a:p>
+            <a:pPr algn="ctr"/>
+          </a:p>
+        </p:txBody>
+      </p:sp>
+      <p:sp>
+        <p:nvSpPr>
+          <p:cNvPr id="18" name="Rectangle 17"/>
+          <p:cNvSpPr/>
+          <p:nvPr/>
+        </p:nvSpPr>
+        <p:spPr>
+          <a:xfrm>
+            <a:off x="4343400" y="3977639"/>
+            <a:ext cx="3474720" cy="73152"/>
           </a:xfrm>
           <a:prstGeom prst="rect">
             <a:avLst/>
@@ -11757,14 +13737,14 @@
       </p:sp>
       <p:sp>
         <p:nvSpPr>
-          <p:cNvPr id="16" name="TextBox 15"/>
+          <p:cNvPr id="19" name="TextBox 18"/>
           <p:cNvSpPr txBox="1"/>
           <p:nvPr/>
         </p:nvSpPr>
         <p:spPr>
           <a:xfrm>
-            <a:off x="6355080" y="4114799"/>
-            <a:ext cx="4846320" cy="1828800"/>
+            <a:off x="4526280" y="4160519"/>
+            <a:ext cx="3108960" cy="1783080"/>
           </a:xfrm>
           <a:prstGeom prst="rect">
             <a:avLst/>
@@ -11779,7 +13759,7 @@
           <a:p>
             <a:pPr>
               <a:spcAft>
-                <a:spcPts val="400"/>
+                <a:spcPts val="600"/>
               </a:spcAft>
               <a:defRPr sz="1100" b="1">
                 <a:solidFill>
@@ -11788,67 +13768,157 @@
               </a:defRPr>
             </a:pPr>
             <a:r>
-              <a:t>BACKUPS &amp; REPORTS</a:t>
-            </a:r>
-          </a:p>
-          <a:p>
-            <a:pPr>
-              <a:spcBef>
-                <a:spcPts val="200"/>
-              </a:spcBef>
-              <a:defRPr sz="950">
-                <a:solidFill>
-                  <a:srgbClr val="FFFFFF"/>
-                </a:solidFill>
-              </a:defRPr>
-            </a:pPr>
-            <a:r>
-              <a:t>• CREATE: Automated timestamped snapshots in backups/ directory</a:t>
-            </a:r>
-          </a:p>
-          <a:p>
-            <a:pPr>
-              <a:spcBef>
-                <a:spcPts val="200"/>
-              </a:spcBef>
-              <a:defRPr sz="950">
-                <a:solidFill>
-                  <a:srgbClr val="FFFFFF"/>
-                </a:solidFill>
-              </a:defRPr>
-            </a:pPr>
-            <a:r>
-              <a:t>• READ: Stream CSV reports (/api/admin/export/users.csv &amp; submissions.csv)</a:t>
-            </a:r>
-          </a:p>
-          <a:p>
-            <a:pPr>
-              <a:spcBef>
-                <a:spcPts val="200"/>
-              </a:spcBef>
-              <a:defRPr sz="950">
-                <a:solidFill>
-                  <a:srgbClr val="FFFFFF"/>
-                </a:solidFill>
-              </a:defRPr>
-            </a:pPr>
-            <a:r>
-              <a:t>• UPDATE: Validate snapshot integrity against active database</a:t>
-            </a:r>
-          </a:p>
-          <a:p>
-            <a:pPr>
-              <a:spcBef>
-                <a:spcPts val="200"/>
-              </a:spcBef>
-              <a:defRPr sz="950">
-                <a:solidFill>
-                  <a:srgbClr val="FFFFFF"/>
-                </a:solidFill>
-              </a:defRPr>
-            </a:pPr>
-            <a:r>
-              <a:t>• DELETE: Rolling backup policy purging snapshots older than 30 days</a:t>
+              <a:t>M5: Zero-Latency Auto-Grading</a:t>
+            </a:r>
+          </a:p>
+          <a:p>
+            <a:pPr>
+              <a:defRPr sz="1000">
+                <a:solidFill>
+                  <a:srgbClr val="CBD5E1"/>
+                </a:solidFill>
+              </a:defRPr>
+            </a:pPr>
+            <a:r>
+              <a:t>In-memory evaluation engine compares answers against key in ~25ms. Displays immediate percentage, pass/fail status, and per-question rationale explanations.</a:t>
+            </a:r>
+          </a:p>
+        </p:txBody>
+      </p:sp>
+      <p:sp>
+        <p:nvSpPr>
+          <p:cNvPr id="20" name="Rounded Rectangle 19"/>
+          <p:cNvSpPr/>
+          <p:nvPr/>
+        </p:nvSpPr>
+        <p:spPr>
+          <a:xfrm>
+            <a:off x="7955280" y="3977639"/>
+            <a:ext cx="3474720" cy="2148840"/>
+          </a:xfrm>
+          <a:prstGeom prst="roundRect">
+            <a:avLst/>
+          </a:prstGeom>
+          <a:solidFill>
+            <a:srgbClr val="1E293B"/>
+          </a:solidFill>
+          <a:ln w="12700">
+            <a:solidFill>
+              <a:srgbClr val="334155"/>
+            </a:solidFill>
+          </a:ln>
+        </p:spPr>
+        <p:style>
+          <a:lnRef idx="1">
+            <a:schemeClr val="accent1"/>
+          </a:lnRef>
+          <a:fillRef idx="3">
+            <a:schemeClr val="accent1"/>
+          </a:fillRef>
+          <a:effectRef idx="2">
+            <a:schemeClr val="accent1"/>
+          </a:effectRef>
+          <a:fontRef idx="minor">
+            <a:schemeClr val="lt1"/>
+          </a:fontRef>
+        </p:style>
+        <p:txBody>
+          <a:bodyPr rtlCol="0" anchor="ctr"/>
+          <a:lstStyle/>
+          <a:p>
+            <a:pPr algn="ctr"/>
+          </a:p>
+        </p:txBody>
+      </p:sp>
+      <p:sp>
+        <p:nvSpPr>
+          <p:cNvPr id="21" name="Rectangle 20"/>
+          <p:cNvSpPr/>
+          <p:nvPr/>
+        </p:nvSpPr>
+        <p:spPr>
+          <a:xfrm>
+            <a:off x="7955280" y="3977639"/>
+            <a:ext cx="3474720" cy="73152"/>
+          </a:xfrm>
+          <a:prstGeom prst="rect">
+            <a:avLst/>
+          </a:prstGeom>
+          <a:solidFill>
+            <a:srgbClr val="0EA5E9"/>
+          </a:solidFill>
+          <a:ln>
+            <a:noFill/>
+          </a:ln>
+        </p:spPr>
+        <p:style>
+          <a:lnRef idx="1">
+            <a:schemeClr val="accent1"/>
+          </a:lnRef>
+          <a:fillRef idx="3">
+            <a:schemeClr val="accent1"/>
+          </a:fillRef>
+          <a:effectRef idx="2">
+            <a:schemeClr val="accent1"/>
+          </a:effectRef>
+          <a:fontRef idx="minor">
+            <a:schemeClr val="lt1"/>
+          </a:fontRef>
+        </p:style>
+        <p:txBody>
+          <a:bodyPr rtlCol="0" anchor="ctr"/>
+          <a:lstStyle/>
+          <a:p>
+            <a:pPr algn="ctr"/>
+          </a:p>
+        </p:txBody>
+      </p:sp>
+      <p:sp>
+        <p:nvSpPr>
+          <p:cNvPr id="22" name="TextBox 21"/>
+          <p:cNvSpPr txBox="1"/>
+          <p:nvPr/>
+        </p:nvSpPr>
+        <p:spPr>
+          <a:xfrm>
+            <a:off x="8138160" y="4160519"/>
+            <a:ext cx="3108960" cy="1783080"/>
+          </a:xfrm>
+          <a:prstGeom prst="rect">
+            <a:avLst/>
+          </a:prstGeom>
+          <a:noFill/>
+        </p:spPr>
+        <p:txBody>
+          <a:bodyPr wrap="square">
+            <a:spAutoFit/>
+          </a:bodyPr>
+          <a:lstStyle/>
+          <a:p>
+            <a:pPr>
+              <a:spcAft>
+                <a:spcPts val="600"/>
+              </a:spcAft>
+              <a:defRPr sz="1100" b="1">
+                <a:solidFill>
+                  <a:srgbClr val="0EA5E9"/>
+                </a:solidFill>
+              </a:defRPr>
+            </a:pPr>
+            <a:r>
+              <a:t>M6: Admin Governance &amp; Telemetry</a:t>
+            </a:r>
+          </a:p>
+          <a:p>
+            <a:pPr>
+              <a:defRPr sz="1000">
+                <a:solidFill>
+                  <a:srgbClr val="CBD5E1"/>
+                </a:solidFill>
+              </a:defRPr>
+            </a:pPr>
+            <a:r>
+              <a:t>Platform telemetry KPIs, filterable user roster, candidate performance scorecard drill-down modal, and instant one-click CSV export streams.</a:t>
             </a:r>
           </a:p>
         </p:txBody>
